--- a/Aula 05/ComandosDDL.pptx
+++ b/Aula 05/ComandosDDL.pptx
@@ -22,7 +22,7 @@
     <p:sldId id="279" r:id="rId13"/>
     <p:sldId id="281" r:id="rId14"/>
     <p:sldId id="265" r:id="rId15"/>
-    <p:sldId id="277" r:id="rId16"/>
+    <p:sldId id="282" r:id="rId16"/>
     <p:sldId id="275" r:id="rId17"/>
   </p:sldIdLst>
   <p:sldSz cx="12192000" cy="6858000"/>
@@ -128,6 +128,15 @@
     </p:ext>
   </p:extLst>
 </p:presentation>
+</file>
+
+<file path=ppt/revisionInfo.xml><?xml version="1.0" encoding="utf-8"?>
+<p1510:revInfo xmlns:a="http://schemas.openxmlformats.org/drawingml/2006/main" xmlns:r="http://schemas.openxmlformats.org/officeDocument/2006/relationships" xmlns:p1510="http://schemas.microsoft.com/office/powerpoint/2015/10/main">
+  <p1510:revLst>
+    <p1510:client id="{2B605CAA-4793-AB79-5A17-B1C52CEFC7E8}" v="1546" dt="2026-08-14T01:04:33.467"/>
+    <p1510:client id="{AE7C63E3-1D4A-B7E6-FF92-F1D6697CFDE3}" v="80" dt="2026-08-14T00:02:39.457"/>
+  </p1510:revLst>
+</p1510:revInfo>
 </file>
 
 <file path=ppt/ink/ink1.xml><?xml version="1.0" encoding="utf-8"?>
@@ -408,7 +417,7 @@
           <a:p>
             <a:fld id="{E2588FEF-F436-4522-91D9-3FBB4B3CDA67}" type="datetimeFigureOut">
               <a:rPr lang="pt-BR" smtClean="0"/>
-              <a:t>16/04/2026</a:t>
+              <a:t>13/08/2026</a:t>
             </a:fld>
             <a:endParaRPr lang="pt-BR"/>
           </a:p>
@@ -906,7 +915,7 @@
           <a:p>
             <a:fld id="{8ADEC918-6A4C-437B-AF1C-9622FE800873}" type="datetimeFigureOut">
               <a:rPr lang="pt-BR" smtClean="0"/>
-              <a:t>16/04/2026</a:t>
+              <a:t>13/08/2026</a:t>
             </a:fld>
             <a:endParaRPr lang="pt-BR"/>
           </a:p>
@@ -1104,7 +1113,7 @@
           <a:p>
             <a:fld id="{8ADEC918-6A4C-437B-AF1C-9622FE800873}" type="datetimeFigureOut">
               <a:rPr lang="pt-BR" smtClean="0"/>
-              <a:t>16/04/2026</a:t>
+              <a:t>13/08/2026</a:t>
             </a:fld>
             <a:endParaRPr lang="pt-BR"/>
           </a:p>
@@ -1312,7 +1321,7 @@
           <a:p>
             <a:fld id="{8ADEC918-6A4C-437B-AF1C-9622FE800873}" type="datetimeFigureOut">
               <a:rPr lang="pt-BR" smtClean="0"/>
-              <a:t>16/04/2026</a:t>
+              <a:t>13/08/2026</a:t>
             </a:fld>
             <a:endParaRPr lang="pt-BR"/>
           </a:p>
@@ -1510,7 +1519,7 @@
           <a:p>
             <a:fld id="{8ADEC918-6A4C-437B-AF1C-9622FE800873}" type="datetimeFigureOut">
               <a:rPr lang="pt-BR" smtClean="0"/>
-              <a:t>16/04/2026</a:t>
+              <a:t>13/08/2026</a:t>
             </a:fld>
             <a:endParaRPr lang="pt-BR"/>
           </a:p>
@@ -1785,7 +1794,7 @@
           <a:p>
             <a:fld id="{8ADEC918-6A4C-437B-AF1C-9622FE800873}" type="datetimeFigureOut">
               <a:rPr lang="pt-BR" smtClean="0"/>
-              <a:t>16/04/2026</a:t>
+              <a:t>13/08/2026</a:t>
             </a:fld>
             <a:endParaRPr lang="pt-BR"/>
           </a:p>
@@ -2050,7 +2059,7 @@
           <a:p>
             <a:fld id="{8ADEC918-6A4C-437B-AF1C-9622FE800873}" type="datetimeFigureOut">
               <a:rPr lang="pt-BR" smtClean="0"/>
-              <a:t>16/04/2026</a:t>
+              <a:t>13/08/2026</a:t>
             </a:fld>
             <a:endParaRPr lang="pt-BR"/>
           </a:p>
@@ -2462,7 +2471,7 @@
           <a:p>
             <a:fld id="{8ADEC918-6A4C-437B-AF1C-9622FE800873}" type="datetimeFigureOut">
               <a:rPr lang="pt-BR" smtClean="0"/>
-              <a:t>16/04/2026</a:t>
+              <a:t>13/08/2026</a:t>
             </a:fld>
             <a:endParaRPr lang="pt-BR"/>
           </a:p>
@@ -2603,7 +2612,7 @@
           <a:p>
             <a:fld id="{8ADEC918-6A4C-437B-AF1C-9622FE800873}" type="datetimeFigureOut">
               <a:rPr lang="pt-BR" smtClean="0"/>
-              <a:t>16/04/2026</a:t>
+              <a:t>13/08/2026</a:t>
             </a:fld>
             <a:endParaRPr lang="pt-BR"/>
           </a:p>
@@ -2716,7 +2725,7 @@
           <a:p>
             <a:fld id="{8ADEC918-6A4C-437B-AF1C-9622FE800873}" type="datetimeFigureOut">
               <a:rPr lang="pt-BR" smtClean="0"/>
-              <a:t>16/04/2026</a:t>
+              <a:t>13/08/2026</a:t>
             </a:fld>
             <a:endParaRPr lang="pt-BR"/>
           </a:p>
@@ -3027,7 +3036,7 @@
           <a:p>
             <a:fld id="{8ADEC918-6A4C-437B-AF1C-9622FE800873}" type="datetimeFigureOut">
               <a:rPr lang="pt-BR" smtClean="0"/>
-              <a:t>16/04/2026</a:t>
+              <a:t>13/08/2026</a:t>
             </a:fld>
             <a:endParaRPr lang="pt-BR"/>
           </a:p>
@@ -3315,7 +3324,7 @@
           <a:p>
             <a:fld id="{8ADEC918-6A4C-437B-AF1C-9622FE800873}" type="datetimeFigureOut">
               <a:rPr lang="pt-BR" smtClean="0"/>
-              <a:t>16/04/2026</a:t>
+              <a:t>13/08/2026</a:t>
             </a:fld>
             <a:endParaRPr lang="pt-BR"/>
           </a:p>
@@ -3556,7 +3565,7 @@
           <a:p>
             <a:fld id="{8ADEC918-6A4C-437B-AF1C-9622FE800873}" type="datetimeFigureOut">
               <a:rPr lang="pt-BR" smtClean="0"/>
-              <a:t>16/04/2026</a:t>
+              <a:t>13/08/2026</a:t>
             </a:fld>
             <a:endParaRPr lang="pt-BR"/>
           </a:p>
@@ -5596,8 +5605,8 @@
         </p:nvSpPr>
         <p:spPr>
           <a:xfrm>
-            <a:off x="4846049" y="228600"/>
-            <a:ext cx="2499901" cy="646331"/>
+            <a:off x="5188949" y="361950"/>
+            <a:ext cx="1814101" cy="646331"/>
           </a:xfrm>
           <a:prstGeom prst="rect">
             <a:avLst/>
@@ -5871,7 +5880,7 @@
         <p:spPr>
           <a:xfrm>
             <a:off x="1459523" y="1011115"/>
-            <a:ext cx="8976946" cy="4708981"/>
+            <a:ext cx="8976946" cy="4401205"/>
           </a:xfrm>
           <a:prstGeom prst="rect">
             <a:avLst/>
@@ -5879,7 +5888,7 @@
           <a:noFill/>
         </p:spPr>
         <p:txBody>
-          <a:bodyPr wrap="square" rtlCol="0">
+          <a:bodyPr wrap="square" lIns="91440" tIns="45720" rIns="91440" bIns="45720" rtlCol="0" anchor="t">
             <a:spAutoFit/>
           </a:bodyPr>
           <a:lstStyle/>
@@ -5926,441 +5935,871 @@
             </a:r>
             <a:r>
               <a:rPr lang="en-US" sz="2000" dirty="0" err="1"/>
+              <a:t>crie</a:t>
+            </a:r>
+            <a:r>
+              <a:rPr lang="en-US" sz="2000" dirty="0"/>
+              <a:t> o banco de dados com as </a:t>
+            </a:r>
+            <a:r>
+              <a:rPr lang="en-US" sz="2000" dirty="0" err="1"/>
+              <a:t>tabelas</a:t>
+            </a:r>
+            <a:r>
+              <a:rPr lang="en-US" sz="2000" dirty="0"/>
+              <a:t>, tendo </a:t>
+            </a:r>
+            <a:r>
+              <a:rPr lang="en-US" sz="2000" dirty="0" err="1"/>
+              <a:t>como</a:t>
+            </a:r>
+            <a:r>
+              <a:rPr lang="en-US" sz="2000" dirty="0"/>
+              <a:t> base </a:t>
+            </a:r>
+            <a:r>
+              <a:rPr lang="en-US" sz="2000" dirty="0" err="1"/>
+              <a:t>os</a:t>
+            </a:r>
+            <a:r>
+              <a:rPr lang="en-US" sz="2000" dirty="0"/>
+              <a:t> dados </a:t>
+            </a:r>
+            <a:r>
+              <a:rPr lang="en-US" sz="2000" dirty="0" err="1"/>
+              <a:t>apresentados</a:t>
+            </a:r>
+            <a:r>
+              <a:rPr lang="en-US" sz="2000" dirty="0"/>
+              <a:t> no </a:t>
+            </a:r>
+            <a:r>
+              <a:rPr lang="en-US" sz="2000" dirty="0" err="1"/>
+              <a:t>próximo</a:t>
+            </a:r>
+            <a:r>
+              <a:rPr lang="en-US" sz="2000" dirty="0"/>
+              <a:t> slide:</a:t>
+            </a:r>
+            <a:endParaRPr lang="en-US" sz="2000" dirty="0">
+              <a:ea typeface="Calibri"/>
+              <a:cs typeface="Calibri"/>
+            </a:endParaRPr>
+          </a:p>
+          <a:p>
+            <a:endParaRPr lang="en-US" sz="2000" dirty="0">
+              <a:ea typeface="Calibri"/>
+              <a:cs typeface="Calibri"/>
+            </a:endParaRPr>
+          </a:p>
+          <a:p>
+            <a:r>
+              <a:rPr lang="en-US" sz="2000" dirty="0">
+                <a:ea typeface="Calibri"/>
+                <a:cs typeface="Calibri"/>
+              </a:rPr>
+              <a:t>Uma </a:t>
+            </a:r>
+            <a:r>
+              <a:rPr lang="en-US" sz="2000" dirty="0" err="1">
+                <a:ea typeface="Calibri"/>
+                <a:cs typeface="Calibri"/>
+              </a:rPr>
+              <a:t>Universidade</a:t>
+            </a:r>
+            <a:r>
+              <a:rPr lang="en-US" sz="2000" dirty="0">
+                <a:ea typeface="Calibri"/>
+                <a:cs typeface="Calibri"/>
+              </a:rPr>
+              <a:t> </a:t>
+            </a:r>
+            <a:r>
+              <a:rPr lang="en-US" sz="2000" dirty="0" err="1">
+                <a:ea typeface="Calibri"/>
+                <a:cs typeface="Calibri"/>
+              </a:rPr>
+              <a:t>possui</a:t>
+            </a:r>
+            <a:r>
+              <a:rPr lang="en-US" sz="2000" dirty="0">
+                <a:ea typeface="Calibri"/>
+                <a:cs typeface="Calibri"/>
+              </a:rPr>
+              <a:t> </a:t>
+            </a:r>
+            <a:r>
+              <a:rPr lang="en-US" sz="2000" dirty="0" err="1">
+                <a:ea typeface="Calibri"/>
+                <a:cs typeface="Calibri"/>
+              </a:rPr>
+              <a:t>diversos</a:t>
+            </a:r>
+            <a:r>
+              <a:rPr lang="en-US" sz="2000" dirty="0">
+                <a:ea typeface="Calibri"/>
+                <a:cs typeface="Calibri"/>
+              </a:rPr>
+              <a:t> </a:t>
+            </a:r>
+            <a:r>
+              <a:rPr lang="en-US" sz="2000" dirty="0" err="1">
+                <a:ea typeface="Calibri"/>
+                <a:cs typeface="Calibri"/>
+              </a:rPr>
+              <a:t>cursos</a:t>
+            </a:r>
+            <a:r>
+              <a:rPr lang="en-US" sz="2000" dirty="0">
+                <a:ea typeface="Calibri"/>
+                <a:cs typeface="Calibri"/>
+              </a:rPr>
+              <a:t>;</a:t>
+            </a:r>
+          </a:p>
+          <a:p>
+            <a:r>
+              <a:rPr lang="en-US" sz="2000" dirty="0">
+                <a:ea typeface="Calibri"/>
+                <a:cs typeface="Calibri"/>
+              </a:rPr>
+              <a:t>Um </a:t>
+            </a:r>
+            <a:r>
+              <a:rPr lang="en-US" sz="2000" dirty="0" err="1">
+                <a:ea typeface="Calibri"/>
+                <a:cs typeface="Calibri"/>
+              </a:rPr>
+              <a:t>curso</a:t>
+            </a:r>
+            <a:r>
+              <a:rPr lang="en-US" sz="2000" dirty="0">
+                <a:ea typeface="Calibri"/>
+                <a:cs typeface="Calibri"/>
+              </a:rPr>
+              <a:t> </a:t>
+            </a:r>
+            <a:r>
+              <a:rPr lang="en-US" sz="2000" dirty="0" err="1">
+                <a:ea typeface="Calibri"/>
+                <a:cs typeface="Calibri"/>
+              </a:rPr>
+              <a:t>apresenta</a:t>
+            </a:r>
+            <a:r>
+              <a:rPr lang="en-US" sz="2000" dirty="0">
+                <a:ea typeface="Calibri"/>
+                <a:cs typeface="Calibri"/>
+              </a:rPr>
+              <a:t> </a:t>
+            </a:r>
+            <a:r>
+              <a:rPr lang="en-US" sz="2000" dirty="0" err="1">
+                <a:ea typeface="Calibri"/>
+                <a:cs typeface="Calibri"/>
+              </a:rPr>
+              <a:t>diversas</a:t>
+            </a:r>
+            <a:r>
+              <a:rPr lang="en-US" sz="2000" dirty="0">
+                <a:ea typeface="Calibri"/>
+                <a:cs typeface="Calibri"/>
+              </a:rPr>
+              <a:t> </a:t>
+            </a:r>
+            <a:r>
+              <a:rPr lang="en-US" sz="2000" dirty="0" err="1">
+                <a:ea typeface="Calibri"/>
+                <a:cs typeface="Calibri"/>
+              </a:rPr>
+              <a:t>disciplinas</a:t>
+            </a:r>
+            <a:r>
+              <a:rPr lang="en-US" sz="2000" dirty="0">
+                <a:ea typeface="Calibri"/>
+                <a:cs typeface="Calibri"/>
+              </a:rPr>
+              <a:t>, </a:t>
+            </a:r>
+            <a:r>
+              <a:rPr lang="en-US" sz="2000" dirty="0" err="1">
+                <a:ea typeface="Calibri"/>
+                <a:cs typeface="Calibri"/>
+              </a:rPr>
+              <a:t>que</a:t>
+            </a:r>
+            <a:r>
+              <a:rPr lang="en-US" sz="2000" dirty="0">
+                <a:ea typeface="Calibri"/>
+                <a:cs typeface="Calibri"/>
+              </a:rPr>
+              <a:t> </a:t>
+            </a:r>
+            <a:r>
+              <a:rPr lang="en-US" sz="2000" dirty="0" err="1">
+                <a:ea typeface="Calibri"/>
+                <a:cs typeface="Calibri"/>
+              </a:rPr>
+              <a:t>podem</a:t>
+            </a:r>
+            <a:r>
+              <a:rPr lang="en-US" sz="2000" dirty="0">
+                <a:ea typeface="Calibri"/>
+                <a:cs typeface="Calibri"/>
+              </a:rPr>
+              <a:t> ser </a:t>
+            </a:r>
+            <a:r>
+              <a:rPr lang="en-US" sz="2000" dirty="0" err="1">
+                <a:ea typeface="Calibri"/>
+                <a:cs typeface="Calibri"/>
+              </a:rPr>
+              <a:t>ministradas</a:t>
+            </a:r>
+            <a:r>
+              <a:rPr lang="en-US" sz="2000" dirty="0">
+                <a:ea typeface="Calibri"/>
+                <a:cs typeface="Calibri"/>
+              </a:rPr>
+              <a:t> </a:t>
+            </a:r>
+            <a:r>
+              <a:rPr lang="en-US" sz="2000" dirty="0" err="1">
+                <a:ea typeface="Calibri"/>
+                <a:cs typeface="Calibri"/>
+              </a:rPr>
+              <a:t>por</a:t>
+            </a:r>
+            <a:r>
+              <a:rPr lang="en-US" sz="2000" dirty="0">
+                <a:ea typeface="Calibri"/>
+                <a:cs typeface="Calibri"/>
+              </a:rPr>
+              <a:t> </a:t>
+            </a:r>
+            <a:r>
+              <a:rPr lang="en-US" sz="2000" dirty="0" err="1">
+                <a:ea typeface="Calibri"/>
+                <a:cs typeface="Calibri"/>
+              </a:rPr>
+              <a:t>professores</a:t>
+            </a:r>
+            <a:r>
+              <a:rPr lang="en-US" sz="2000" dirty="0">
+                <a:ea typeface="Calibri"/>
+                <a:cs typeface="Calibri"/>
+              </a:rPr>
+              <a:t>;</a:t>
+            </a:r>
+          </a:p>
+          <a:p>
+            <a:r>
+              <a:rPr lang="en-US" sz="2000" dirty="0">
+                <a:ea typeface="Calibri"/>
+                <a:cs typeface="Calibri"/>
+              </a:rPr>
+              <a:t>Um </a:t>
+            </a:r>
+            <a:r>
+              <a:rPr lang="en-US" sz="2000" dirty="0" err="1">
+                <a:ea typeface="Calibri"/>
+                <a:cs typeface="Calibri"/>
+              </a:rPr>
+              <a:t>aluno</a:t>
+            </a:r>
+            <a:r>
+              <a:rPr lang="en-US" sz="2000" dirty="0">
+                <a:ea typeface="Calibri"/>
+                <a:cs typeface="Calibri"/>
+              </a:rPr>
+              <a:t> </a:t>
+            </a:r>
+            <a:r>
+              <a:rPr lang="en-US" sz="2000" dirty="0" err="1">
+                <a:ea typeface="Calibri"/>
+                <a:cs typeface="Calibri"/>
+              </a:rPr>
+              <a:t>pode</a:t>
+            </a:r>
+            <a:r>
+              <a:rPr lang="en-US" sz="2000" dirty="0">
+                <a:ea typeface="Calibri"/>
+                <a:cs typeface="Calibri"/>
+              </a:rPr>
+              <a:t> se matricular </a:t>
+            </a:r>
+            <a:r>
+              <a:rPr lang="en-US" sz="2000" dirty="0" err="1">
+                <a:ea typeface="Calibri"/>
+                <a:cs typeface="Calibri"/>
+              </a:rPr>
+              <a:t>nas</a:t>
+            </a:r>
+            <a:r>
+              <a:rPr lang="en-US" sz="2000" dirty="0">
+                <a:ea typeface="Calibri"/>
+                <a:cs typeface="Calibri"/>
+              </a:rPr>
+              <a:t> </a:t>
+            </a:r>
+            <a:r>
+              <a:rPr lang="en-US" sz="2000" dirty="0" err="1">
+                <a:ea typeface="Calibri"/>
+                <a:cs typeface="Calibri"/>
+              </a:rPr>
+              <a:t>disciplinas</a:t>
+            </a:r>
+            <a:r>
+              <a:rPr lang="en-US" sz="2000" dirty="0">
+                <a:ea typeface="Calibri"/>
+                <a:cs typeface="Calibri"/>
+              </a:rPr>
+              <a:t> e as </a:t>
+            </a:r>
+            <a:r>
+              <a:rPr lang="en-US" sz="2000" dirty="0" err="1">
+                <a:ea typeface="Calibri"/>
+                <a:cs typeface="Calibri"/>
+              </a:rPr>
+              <a:t>disciplinas</a:t>
+            </a:r>
+            <a:r>
+              <a:rPr lang="en-US" sz="2000" dirty="0">
+                <a:ea typeface="Calibri"/>
+                <a:cs typeface="Calibri"/>
+              </a:rPr>
+              <a:t> </a:t>
+            </a:r>
+            <a:r>
+              <a:rPr lang="en-US" sz="2000" dirty="0" err="1">
+                <a:ea typeface="Calibri"/>
+                <a:cs typeface="Calibri"/>
+              </a:rPr>
+              <a:t>podem</a:t>
+            </a:r>
+            <a:r>
+              <a:rPr lang="en-US" sz="2000" dirty="0">
+                <a:ea typeface="Calibri"/>
+                <a:cs typeface="Calibri"/>
+              </a:rPr>
+              <a:t> </a:t>
+            </a:r>
+            <a:r>
+              <a:rPr lang="en-US" sz="2000" dirty="0" err="1">
+                <a:ea typeface="Calibri"/>
+                <a:cs typeface="Calibri"/>
+              </a:rPr>
+              <a:t>conter</a:t>
+            </a:r>
+            <a:r>
+              <a:rPr lang="en-US" sz="2000" dirty="0">
+                <a:ea typeface="Calibri"/>
+                <a:cs typeface="Calibri"/>
+              </a:rPr>
+              <a:t> </a:t>
+            </a:r>
+            <a:r>
+              <a:rPr lang="en-US" sz="2000" dirty="0" err="1">
+                <a:ea typeface="Calibri"/>
+                <a:cs typeface="Calibri"/>
+              </a:rPr>
+              <a:t>alunos</a:t>
+            </a:r>
+            <a:r>
+              <a:rPr lang="en-US" sz="2000" dirty="0">
+                <a:ea typeface="Calibri"/>
+                <a:cs typeface="Calibri"/>
+              </a:rPr>
+              <a:t>;</a:t>
+            </a:r>
+          </a:p>
+          <a:p>
+            <a:r>
+              <a:rPr lang="en-US" sz="2000" dirty="0">
+                <a:ea typeface="Calibri"/>
+                <a:cs typeface="Calibri"/>
+              </a:rPr>
+              <a:t>O </a:t>
+            </a:r>
+            <a:r>
+              <a:rPr lang="en-US" sz="2000" dirty="0" err="1">
+                <a:ea typeface="Calibri"/>
+                <a:cs typeface="Calibri"/>
+              </a:rPr>
+              <a:t>sistema</a:t>
+            </a:r>
+            <a:r>
+              <a:rPr lang="en-US" sz="2000" dirty="0">
+                <a:ea typeface="Calibri"/>
+                <a:cs typeface="Calibri"/>
+              </a:rPr>
+              <a:t> </a:t>
+            </a:r>
+            <a:r>
+              <a:rPr lang="en-US" sz="2000" dirty="0" err="1">
+                <a:ea typeface="Calibri"/>
+                <a:cs typeface="Calibri"/>
+              </a:rPr>
+              <a:t>deve</a:t>
+            </a:r>
+            <a:r>
+              <a:rPr lang="en-US" sz="2000" dirty="0">
+                <a:ea typeface="Calibri"/>
+                <a:cs typeface="Calibri"/>
+              </a:rPr>
+              <a:t> </a:t>
+            </a:r>
+            <a:r>
+              <a:rPr lang="en-US" sz="2000" dirty="0" err="1">
+                <a:ea typeface="Calibri"/>
+                <a:cs typeface="Calibri"/>
+              </a:rPr>
+              <a:t>armazenar</a:t>
+            </a:r>
+            <a:r>
+              <a:rPr lang="en-US" sz="2000" dirty="0">
+                <a:ea typeface="Calibri"/>
+                <a:cs typeface="Calibri"/>
+              </a:rPr>
+              <a:t> </a:t>
+            </a:r>
+            <a:r>
+              <a:rPr lang="en-US" sz="2000" dirty="0" err="1">
+                <a:ea typeface="Calibri"/>
+                <a:cs typeface="Calibri"/>
+              </a:rPr>
+              <a:t>informações</a:t>
+            </a:r>
+            <a:r>
+              <a:rPr lang="en-US" sz="2000" dirty="0">
+                <a:ea typeface="Calibri"/>
+                <a:cs typeface="Calibri"/>
+              </a:rPr>
+              <a:t> de </a:t>
+            </a:r>
+            <a:r>
+              <a:rPr lang="en-US" sz="2000" dirty="0" err="1">
+                <a:ea typeface="Calibri"/>
+                <a:cs typeface="Calibri"/>
+              </a:rPr>
+              <a:t>Alunos</a:t>
+            </a:r>
+            <a:r>
+              <a:rPr lang="en-US" sz="2000" dirty="0">
+                <a:ea typeface="Calibri"/>
+                <a:cs typeface="Calibri"/>
+              </a:rPr>
+              <a:t>, </a:t>
+            </a:r>
+            <a:r>
+              <a:rPr lang="en-US" sz="2000" dirty="0" err="1">
+                <a:ea typeface="Calibri"/>
+                <a:cs typeface="Calibri"/>
+              </a:rPr>
+              <a:t>Cursos</a:t>
+            </a:r>
+            <a:r>
+              <a:rPr lang="en-US" sz="2000" dirty="0">
+                <a:ea typeface="Calibri"/>
+                <a:cs typeface="Calibri"/>
+              </a:rPr>
+              <a:t>, </a:t>
+            </a:r>
+            <a:r>
+              <a:rPr lang="en-US" sz="2000" dirty="0" err="1">
+                <a:ea typeface="Calibri"/>
+                <a:cs typeface="Calibri"/>
+              </a:rPr>
+              <a:t>Disciplinas</a:t>
+            </a:r>
+            <a:r>
+              <a:rPr lang="en-US" sz="2000" dirty="0">
+                <a:ea typeface="Calibri"/>
+                <a:cs typeface="Calibri"/>
+              </a:rPr>
+              <a:t>, </a:t>
+            </a:r>
+            <a:r>
+              <a:rPr lang="en-US" sz="2000" dirty="0" err="1">
+                <a:ea typeface="Calibri"/>
+                <a:cs typeface="Calibri"/>
+              </a:rPr>
+              <a:t>Matrículas</a:t>
+            </a:r>
+            <a:r>
+              <a:rPr lang="en-US" sz="2000" dirty="0">
+                <a:ea typeface="Calibri"/>
+                <a:cs typeface="Calibri"/>
+              </a:rPr>
+              <a:t> e </a:t>
+            </a:r>
+            <a:r>
+              <a:rPr lang="en-US" sz="2000" dirty="0" err="1">
+                <a:ea typeface="Calibri"/>
+                <a:cs typeface="Calibri"/>
+              </a:rPr>
+              <a:t>Professores</a:t>
+            </a:r>
+            <a:r>
+              <a:rPr lang="en-US" sz="2000" dirty="0">
+                <a:ea typeface="Calibri"/>
+                <a:cs typeface="Calibri"/>
+              </a:rPr>
+              <a:t>.</a:t>
+            </a:r>
+          </a:p>
+          <a:p>
+            <a:endParaRPr lang="en-US" sz="2000" dirty="0">
+              <a:ea typeface="Calibri"/>
+              <a:cs typeface="Calibri"/>
+            </a:endParaRPr>
+          </a:p>
+          <a:p>
+            <a:r>
+              <a:rPr lang="en-US" sz="2000" dirty="0" err="1">
+                <a:ea typeface="Calibri"/>
+                <a:cs typeface="Calibri"/>
+              </a:rPr>
+              <a:t>Após</a:t>
+            </a:r>
+            <a:r>
+              <a:rPr lang="en-US" sz="2000" dirty="0">
+                <a:ea typeface="Calibri"/>
+                <a:cs typeface="Calibri"/>
+              </a:rPr>
+              <a:t> a </a:t>
+            </a:r>
+            <a:r>
+              <a:rPr lang="en-US" sz="2000" dirty="0" err="1">
+                <a:ea typeface="Calibri"/>
+                <a:cs typeface="Calibri"/>
+              </a:rPr>
+              <a:t>modelagem</a:t>
+            </a:r>
+            <a:r>
+              <a:rPr lang="en-US" sz="2000" dirty="0">
+                <a:ea typeface="Calibri"/>
+                <a:cs typeface="Calibri"/>
+              </a:rPr>
+              <a:t> </a:t>
+            </a:r>
+            <a:r>
+              <a:rPr lang="en-US" sz="2000" dirty="0" err="1">
+                <a:ea typeface="Calibri"/>
+                <a:cs typeface="Calibri"/>
+              </a:rPr>
+              <a:t>inicial</a:t>
+            </a:r>
+            <a:r>
+              <a:rPr lang="en-US" sz="2000" dirty="0">
+                <a:ea typeface="Calibri"/>
+                <a:cs typeface="Calibri"/>
+              </a:rPr>
+              <a:t>, </a:t>
+            </a:r>
+            <a:r>
+              <a:rPr lang="en-US" sz="2000" dirty="0" err="1">
+                <a:ea typeface="Calibri"/>
+                <a:cs typeface="Calibri"/>
+              </a:rPr>
               <a:t>faça</a:t>
             </a:r>
             <a:r>
-              <a:rPr lang="en-US" sz="2000" dirty="0"/>
-              <a:t> o que se </a:t>
-            </a:r>
-            <a:r>
-              <a:rPr lang="en-US" sz="2000" dirty="0" err="1"/>
+              <a:rPr lang="en-US" sz="2000" dirty="0">
+                <a:ea typeface="Calibri"/>
+                <a:cs typeface="Calibri"/>
+              </a:rPr>
+              <a:t> o </a:t>
+            </a:r>
+            <a:r>
+              <a:rPr lang="en-US" sz="2000" dirty="0" err="1">
+                <a:ea typeface="Calibri"/>
+                <a:cs typeface="Calibri"/>
+              </a:rPr>
+              <a:t>que</a:t>
+            </a:r>
+            <a:r>
+              <a:rPr lang="en-US" sz="2000" dirty="0">
+                <a:ea typeface="Calibri"/>
+                <a:cs typeface="Calibri"/>
+              </a:rPr>
+              <a:t> se </a:t>
+            </a:r>
+            <a:r>
+              <a:rPr lang="en-US" sz="2000" dirty="0" err="1">
+                <a:ea typeface="Calibri"/>
+                <a:cs typeface="Calibri"/>
+              </a:rPr>
               <a:t>pede</a:t>
             </a:r>
             <a:r>
-              <a:rPr lang="en-US" sz="2000" dirty="0"/>
+              <a:rPr lang="en-US" sz="2000" dirty="0">
+                <a:ea typeface="Calibri"/>
+                <a:cs typeface="Calibri"/>
+              </a:rPr>
               <a:t>:</a:t>
             </a:r>
           </a:p>
           <a:p>
-            <a:endParaRPr lang="en-US" sz="2000" dirty="0"/>
+            <a:endParaRPr lang="en-US" sz="2000" dirty="0">
+              <a:ea typeface="Calibri"/>
+              <a:cs typeface="Calibri"/>
+            </a:endParaRPr>
           </a:p>
           <a:p>
             <a:pPr marL="342900" indent="-342900">
-              <a:buAutoNum type="arabicPeriod"/>
+              <a:buFont typeface="Calibri"/>
+              <a:buChar char="-"/>
             </a:pPr>
             <a:r>
-              <a:rPr lang="en-US" sz="2000" dirty="0"/>
-              <a:t>Banco de Dados:</a:t>
+              <a:rPr lang="en-US" sz="2000" dirty="0">
+                <a:ea typeface="Calibri"/>
+                <a:cs typeface="Calibri"/>
+              </a:rPr>
+              <a:t>Adicione </a:t>
+            </a:r>
+            <a:r>
+              <a:rPr lang="en-US" sz="2000" dirty="0" err="1">
+                <a:ea typeface="Calibri"/>
+                <a:cs typeface="Calibri"/>
+              </a:rPr>
+              <a:t>uma</a:t>
+            </a:r>
+            <a:r>
+              <a:rPr lang="en-US" sz="2000" dirty="0">
+                <a:ea typeface="Calibri"/>
+                <a:cs typeface="Calibri"/>
+              </a:rPr>
+              <a:t> nova </a:t>
+            </a:r>
+            <a:r>
+              <a:rPr lang="en-US" sz="2000" dirty="0" err="1">
+                <a:ea typeface="Calibri"/>
+                <a:cs typeface="Calibri"/>
+              </a:rPr>
+              <a:t>coluna</a:t>
+            </a:r>
+            <a:r>
+              <a:rPr lang="en-US" sz="2000" dirty="0">
+                <a:ea typeface="Calibri"/>
+                <a:cs typeface="Calibri"/>
+              </a:rPr>
+              <a:t> 'nota' </a:t>
+            </a:r>
+            <a:r>
+              <a:rPr lang="en-US" sz="2000" dirty="0" err="1">
+                <a:ea typeface="Calibri"/>
+                <a:cs typeface="Calibri"/>
+              </a:rPr>
+              <a:t>na</a:t>
+            </a:r>
+            <a:r>
+              <a:rPr lang="en-US" sz="2000" dirty="0">
+                <a:ea typeface="Calibri"/>
+                <a:cs typeface="Calibri"/>
+              </a:rPr>
+              <a:t> </a:t>
+            </a:r>
+            <a:r>
+              <a:rPr lang="en-US" sz="2000" dirty="0" err="1">
+                <a:ea typeface="Calibri"/>
+                <a:cs typeface="Calibri"/>
+              </a:rPr>
+              <a:t>tabela</a:t>
+            </a:r>
+            <a:r>
+              <a:rPr lang="en-US" sz="2000" dirty="0">
+                <a:ea typeface="Calibri"/>
+                <a:cs typeface="Calibri"/>
+              </a:rPr>
+              <a:t> de </a:t>
+            </a:r>
+            <a:r>
+              <a:rPr lang="en-US" sz="2000" dirty="0" err="1">
+                <a:ea typeface="Calibri"/>
+                <a:cs typeface="Calibri"/>
+              </a:rPr>
+              <a:t>Alunos</a:t>
+            </a:r>
+            <a:r>
+              <a:rPr lang="en-US" sz="2000" dirty="0">
+                <a:ea typeface="Calibri"/>
+                <a:cs typeface="Calibri"/>
+              </a:rPr>
+              <a:t>;</a:t>
             </a:r>
           </a:p>
           <a:p>
             <a:pPr marL="342900" indent="-342900">
-              <a:buFont typeface="Arial" panose="020B0604020202020204" pitchFamily="34" charset="0"/>
-              <a:buChar char="•"/>
+              <a:buFont typeface="Calibri"/>
+              <a:buChar char="-"/>
             </a:pPr>
             <a:r>
-              <a:rPr lang="en-US" sz="2000" dirty="0" err="1"/>
-              <a:t>Crie</a:t>
-            </a:r>
-            <a:r>
-              <a:rPr lang="en-US" sz="2000" dirty="0"/>
-              <a:t> um banco de dados </a:t>
-            </a:r>
-            <a:r>
-              <a:rPr lang="en-US" sz="2000" dirty="0" err="1"/>
-              <a:t>chamado</a:t>
-            </a:r>
-            <a:r>
-              <a:rPr lang="en-US" sz="2000" dirty="0"/>
-              <a:t> ‘</a:t>
-            </a:r>
-            <a:r>
-              <a:rPr lang="en-US" sz="2000" dirty="0" err="1"/>
-              <a:t>streaming_db</a:t>
-            </a:r>
-            <a:r>
-              <a:rPr lang="en-US" sz="2000" dirty="0"/>
-              <a:t>’ </a:t>
-            </a:r>
-            <a:r>
-              <a:rPr lang="en-US" sz="2000" dirty="0" err="1"/>
-              <a:t>verificando</a:t>
-            </a:r>
-            <a:r>
-              <a:rPr lang="en-US" sz="2000" dirty="0"/>
+              <a:rPr lang="en-US" sz="2000" dirty="0" err="1">
+                <a:ea typeface="Calibri"/>
+                <a:cs typeface="Calibri"/>
+              </a:rPr>
+              <a:t>Modifique</a:t>
+            </a:r>
+            <a:r>
+              <a:rPr lang="en-US" sz="2000" dirty="0">
+                <a:ea typeface="Calibri"/>
+                <a:cs typeface="Calibri"/>
+              </a:rPr>
+              <a:t> a </a:t>
+            </a:r>
+            <a:r>
+              <a:rPr lang="en-US" sz="2000" dirty="0" err="1">
+                <a:ea typeface="Calibri"/>
+                <a:cs typeface="Calibri"/>
+              </a:rPr>
+              <a:t>tabela</a:t>
+            </a:r>
+            <a:r>
+              <a:rPr lang="en-US" sz="2000" dirty="0">
+                <a:ea typeface="Calibri"/>
+                <a:cs typeface="Calibri"/>
+              </a:rPr>
               <a:t> </a:t>
             </a:r>
             <a:r>
-              <a:rPr lang="en-US" sz="2000" dirty="0" err="1"/>
-              <a:t>sua</a:t>
-            </a:r>
-            <a:r>
-              <a:rPr lang="en-US" sz="2000" dirty="0"/>
+              <a:rPr lang="en-US" sz="2000" dirty="0" err="1">
+                <a:ea typeface="Calibri"/>
+                <a:cs typeface="Calibri"/>
+              </a:rPr>
+              <a:t>Professores</a:t>
+            </a:r>
+            <a:r>
+              <a:rPr lang="en-US" sz="2000" dirty="0">
+                <a:ea typeface="Calibri"/>
+                <a:cs typeface="Calibri"/>
+              </a:rPr>
+              <a:t>, </a:t>
+            </a:r>
+            <a:r>
+              <a:rPr lang="en-US" sz="2000" dirty="0" err="1">
+                <a:ea typeface="Calibri"/>
+                <a:cs typeface="Calibri"/>
+              </a:rPr>
+              <a:t>alterando</a:t>
+            </a:r>
+            <a:r>
+              <a:rPr lang="en-US" sz="2000" dirty="0">
+                <a:ea typeface="Calibri"/>
+                <a:cs typeface="Calibri"/>
+              </a:rPr>
+              <a:t> a </a:t>
+            </a:r>
+            <a:r>
+              <a:rPr lang="en-US" sz="2000" dirty="0" err="1">
+                <a:ea typeface="Calibri"/>
+                <a:cs typeface="Calibri"/>
+              </a:rPr>
+              <a:t>coluna</a:t>
+            </a:r>
+            <a:r>
+              <a:rPr lang="en-US" sz="2000" dirty="0">
+                <a:ea typeface="Calibri"/>
+                <a:cs typeface="Calibri"/>
+              </a:rPr>
+              <a:t> email para </a:t>
+            </a:r>
+            <a:r>
+              <a:rPr lang="en-US" sz="2000" dirty="0" err="1">
+                <a:ea typeface="Calibri"/>
+                <a:cs typeface="Calibri"/>
+              </a:rPr>
+              <a:t>não</a:t>
+            </a:r>
+            <a:r>
+              <a:rPr lang="en-US" sz="2000" dirty="0">
+                <a:ea typeface="Calibri"/>
+                <a:cs typeface="Calibri"/>
+              </a:rPr>
               <a:t> </a:t>
             </a:r>
             <a:r>
-              <a:rPr lang="en-US" sz="2000" dirty="0" err="1"/>
-              <a:t>existência</a:t>
-            </a:r>
-            <a:r>
-              <a:rPr lang="en-US" sz="2000" dirty="0"/>
-              <a:t>. Caso </a:t>
-            </a:r>
-            <a:r>
-              <a:rPr lang="en-US" sz="2000" dirty="0" err="1"/>
-              <a:t>exista</a:t>
-            </a:r>
-            <a:r>
-              <a:rPr lang="en-US" sz="2000" dirty="0"/>
-              <a:t>, </a:t>
-            </a:r>
-            <a:r>
-              <a:rPr lang="en-US" sz="2000" dirty="0" err="1"/>
-              <a:t>exclua</a:t>
-            </a:r>
-            <a:r>
-              <a:rPr lang="en-US" sz="2000" dirty="0"/>
-              <a:t> antes </a:t>
-            </a:r>
-            <a:r>
-              <a:rPr lang="en-US" sz="2000" dirty="0" err="1"/>
-              <a:t>mesmo</a:t>
-            </a:r>
-            <a:r>
-              <a:rPr lang="en-US" sz="2000" dirty="0"/>
-              <a:t> de </a:t>
-            </a:r>
-            <a:r>
-              <a:rPr lang="en-US" sz="2000" dirty="0" err="1"/>
-              <a:t>criá</a:t>
-            </a:r>
-            <a:r>
-              <a:rPr lang="en-US" sz="2000" dirty="0"/>
-              <a:t>-lo;</a:t>
+              <a:rPr lang="en-US" sz="2000" dirty="0" err="1">
+                <a:ea typeface="Calibri"/>
+                <a:cs typeface="Calibri"/>
+              </a:rPr>
+              <a:t>nula</a:t>
+            </a:r>
+            <a:r>
+              <a:rPr lang="en-US" sz="2000" dirty="0">
+                <a:ea typeface="Calibri"/>
+                <a:cs typeface="Calibri"/>
+              </a:rPr>
+              <a:t>;</a:t>
             </a:r>
           </a:p>
           <a:p>
             <a:pPr marL="342900" indent="-342900">
-              <a:buFont typeface="Arial" panose="020B0604020202020204" pitchFamily="34" charset="0"/>
-              <a:buChar char="•"/>
+              <a:buFont typeface="Calibri"/>
+              <a:buChar char="-"/>
             </a:pPr>
             <a:r>
-              <a:rPr lang="en-US" sz="2000" dirty="0"/>
-              <a:t>Execute o </a:t>
-            </a:r>
-            <a:r>
-              <a:rPr lang="en-US" sz="2000" dirty="0" err="1"/>
-              <a:t>comando</a:t>
-            </a:r>
-            <a:r>
-              <a:rPr lang="en-US" sz="2000" dirty="0"/>
-              <a:t> para </a:t>
-            </a:r>
-            <a:r>
-              <a:rPr lang="en-US" sz="2000" dirty="0" err="1"/>
-              <a:t>utilizar</a:t>
-            </a:r>
-            <a:r>
-              <a:rPr lang="en-US" sz="2000" dirty="0"/>
-              <a:t> </a:t>
-            </a:r>
-            <a:r>
-              <a:rPr lang="en-US" sz="2000" dirty="0" err="1"/>
-              <a:t>seu</a:t>
-            </a:r>
-            <a:r>
-              <a:rPr lang="en-US" sz="2000" dirty="0"/>
-              <a:t> banco de dados;</a:t>
-            </a:r>
-          </a:p>
-          <a:p>
-            <a:pPr marL="342900" indent="-342900">
-              <a:buFont typeface="Arial" panose="020B0604020202020204" pitchFamily="34" charset="0"/>
-              <a:buChar char="•"/>
-            </a:pPr>
-            <a:endParaRPr lang="en-US" sz="2000" dirty="0"/>
-          </a:p>
-          <a:p>
-            <a:pPr marL="457200" indent="-457200">
-              <a:buAutoNum type="arabicPeriod" startAt="2"/>
-            </a:pPr>
-            <a:r>
-              <a:rPr lang="en-US" sz="2000" dirty="0" err="1"/>
-              <a:t>Tabela</a:t>
-            </a:r>
-            <a:r>
-              <a:rPr lang="en-US" sz="2000" dirty="0"/>
-              <a:t>:</a:t>
-            </a:r>
-          </a:p>
-          <a:p>
-            <a:pPr marL="342900" indent="-342900">
-              <a:buFont typeface="Arial" panose="020B0604020202020204" pitchFamily="34" charset="0"/>
-              <a:buChar char="•"/>
-            </a:pPr>
-            <a:r>
-              <a:rPr lang="en-US" sz="2000" dirty="0" err="1"/>
-              <a:t>Crie</a:t>
-            </a:r>
-            <a:r>
-              <a:rPr lang="en-US" sz="2000" dirty="0"/>
-              <a:t> </a:t>
-            </a:r>
-            <a:r>
-              <a:rPr lang="en-US" sz="2000" dirty="0" err="1"/>
-              <a:t>uma</a:t>
-            </a:r>
-            <a:r>
-              <a:rPr lang="en-US" sz="2000" dirty="0"/>
-              <a:t> nova </a:t>
-            </a:r>
-            <a:r>
-              <a:rPr lang="en-US" sz="2000" dirty="0" err="1"/>
-              <a:t>tabela</a:t>
-            </a:r>
-            <a:r>
-              <a:rPr lang="en-US" sz="2000" dirty="0"/>
-              <a:t> ‘</a:t>
-            </a:r>
-            <a:r>
-              <a:rPr lang="en-US" sz="2000" dirty="0" err="1"/>
-              <a:t>Filme</a:t>
-            </a:r>
-            <a:r>
-              <a:rPr lang="en-US" sz="2000" dirty="0"/>
-              <a:t>’, </a:t>
-            </a:r>
-            <a:r>
-              <a:rPr lang="en-US" sz="2000" dirty="0" err="1"/>
-              <a:t>que</a:t>
-            </a:r>
-            <a:r>
-              <a:rPr lang="en-US" sz="2000" dirty="0"/>
-              <a:t> </a:t>
-            </a:r>
-            <a:r>
-              <a:rPr lang="en-US" sz="2000" dirty="0" err="1"/>
-              <a:t>deve</a:t>
-            </a:r>
-            <a:r>
-              <a:rPr lang="en-US" sz="2000" dirty="0"/>
-              <a:t> </a:t>
-            </a:r>
-            <a:r>
-              <a:rPr lang="en-US" sz="2000" dirty="0" err="1"/>
-              <a:t>conter</a:t>
-            </a:r>
-            <a:r>
-              <a:rPr lang="en-US" sz="2000" dirty="0"/>
-              <a:t> um </a:t>
-            </a:r>
-            <a:r>
-              <a:rPr lang="en-US" sz="2000" dirty="0" err="1"/>
-              <a:t>identificador</a:t>
-            </a:r>
-            <a:r>
-              <a:rPr lang="en-US" sz="2000" dirty="0"/>
-              <a:t> </a:t>
-            </a:r>
-            <a:r>
-              <a:rPr lang="en-US" sz="2000" dirty="0" err="1"/>
-              <a:t>único</a:t>
-            </a:r>
-            <a:r>
-              <a:rPr lang="en-US" sz="2000" dirty="0"/>
-              <a:t> </a:t>
-            </a:r>
-            <a:r>
-              <a:rPr lang="en-US" sz="2000" dirty="0" err="1"/>
-              <a:t>obrigatório</a:t>
-            </a:r>
-            <a:r>
-              <a:rPr lang="en-US" sz="2000" dirty="0"/>
-              <a:t> e auto-incremental, um </a:t>
-            </a:r>
-            <a:r>
-              <a:rPr lang="en-US" sz="2000" dirty="0" err="1"/>
-              <a:t>título</a:t>
-            </a:r>
-            <a:r>
-              <a:rPr lang="en-US" sz="2000" dirty="0"/>
-              <a:t> (20 </a:t>
-            </a:r>
-            <a:r>
-              <a:rPr lang="en-US" sz="2000" dirty="0" err="1"/>
-              <a:t>caracteres</a:t>
-            </a:r>
-            <a:r>
-              <a:rPr lang="en-US" sz="2000" dirty="0"/>
-              <a:t>), um </a:t>
-            </a:r>
-            <a:r>
-              <a:rPr lang="en-US" sz="2000" dirty="0" err="1"/>
-              <a:t>gênero</a:t>
-            </a:r>
-            <a:r>
-              <a:rPr lang="en-US" sz="2000" dirty="0"/>
-              <a:t> (30 </a:t>
-            </a:r>
-            <a:r>
-              <a:rPr lang="en-US" sz="2000" dirty="0" err="1"/>
-              <a:t>caracteres</a:t>
-            </a:r>
-            <a:r>
-              <a:rPr lang="en-US" sz="2000" dirty="0"/>
-              <a:t>) e o </a:t>
-            </a:r>
-            <a:r>
-              <a:rPr lang="en-US" sz="2000" dirty="0" err="1"/>
-              <a:t>ano</a:t>
-            </a:r>
-            <a:r>
-              <a:rPr lang="en-US" sz="2000" dirty="0"/>
-              <a:t> de </a:t>
-            </a:r>
-            <a:r>
-              <a:rPr lang="en-US" sz="2000" dirty="0" err="1"/>
-              <a:t>lançamento</a:t>
-            </a:r>
-            <a:r>
-              <a:rPr lang="en-US" sz="2000" dirty="0"/>
-              <a:t> (</a:t>
-            </a:r>
-            <a:r>
-              <a:rPr lang="en-US" sz="2000" dirty="0" err="1"/>
-              <a:t>obrigatório</a:t>
-            </a:r>
-            <a:r>
-              <a:rPr lang="en-US" sz="2000" dirty="0"/>
-              <a:t>);</a:t>
-            </a:r>
-          </a:p>
-          <a:p>
-            <a:pPr marL="342900" indent="-342900">
-              <a:buFont typeface="Arial" panose="020B0604020202020204" pitchFamily="34" charset="0"/>
-              <a:buChar char="•"/>
-            </a:pPr>
-            <a:endParaRPr lang="en-US" sz="2000" dirty="0"/>
-          </a:p>
-          <a:p>
-            <a:pPr marL="457200" indent="-457200">
-              <a:buAutoNum type="arabicPeriod" startAt="3"/>
-            </a:pPr>
-            <a:r>
-              <a:rPr lang="en-US" sz="2000" dirty="0" err="1"/>
-              <a:t>Manutenção</a:t>
-            </a:r>
-            <a:r>
-              <a:rPr lang="en-US" sz="2000" dirty="0"/>
-              <a:t>:</a:t>
-            </a:r>
-          </a:p>
-          <a:p>
-            <a:pPr marL="342900" indent="-342900">
-              <a:buFont typeface="Arial" panose="020B0604020202020204" pitchFamily="34" charset="0"/>
-              <a:buChar char="•"/>
-            </a:pPr>
-            <a:r>
-              <a:rPr lang="en-US" sz="2000" dirty="0" err="1"/>
-              <a:t>Inclua</a:t>
-            </a:r>
-            <a:r>
-              <a:rPr lang="en-US" sz="2000" dirty="0"/>
-              <a:t> </a:t>
-            </a:r>
-            <a:r>
-              <a:rPr lang="en-US" sz="2000" dirty="0" err="1"/>
-              <a:t>uma</a:t>
-            </a:r>
-            <a:r>
-              <a:rPr lang="en-US" sz="2000" dirty="0"/>
-              <a:t> nova </a:t>
-            </a:r>
-            <a:r>
-              <a:rPr lang="en-US" sz="2000" dirty="0" err="1"/>
-              <a:t>coluna</a:t>
-            </a:r>
-            <a:r>
-              <a:rPr lang="en-US" sz="2000" dirty="0"/>
-              <a:t> para a </a:t>
-            </a:r>
-            <a:r>
-              <a:rPr lang="en-US" sz="2000" dirty="0" err="1"/>
-              <a:t>classificação</a:t>
-            </a:r>
-            <a:r>
-              <a:rPr lang="en-US" sz="2000" dirty="0"/>
-              <a:t> </a:t>
-            </a:r>
-            <a:r>
-              <a:rPr lang="en-US" sz="2000" dirty="0" err="1"/>
-              <a:t>etária</a:t>
-            </a:r>
-            <a:r>
-              <a:rPr lang="en-US" sz="2000" dirty="0"/>
-              <a:t>;</a:t>
-            </a:r>
-          </a:p>
-          <a:p>
-            <a:pPr marL="342900" indent="-342900">
-              <a:buFont typeface="Arial" panose="020B0604020202020204" pitchFamily="34" charset="0"/>
-              <a:buChar char="•"/>
-            </a:pPr>
-            <a:r>
-              <a:rPr lang="en-US" sz="2000" dirty="0" err="1"/>
-              <a:t>Percebeu</a:t>
-            </a:r>
-            <a:r>
-              <a:rPr lang="en-US" sz="2000" dirty="0"/>
-              <a:t>-se </a:t>
-            </a:r>
-            <a:r>
-              <a:rPr lang="en-US" sz="2000" dirty="0" err="1"/>
-              <a:t>que</a:t>
-            </a:r>
-            <a:r>
-              <a:rPr lang="en-US" sz="2000" dirty="0"/>
-              <a:t> 20 </a:t>
-            </a:r>
-            <a:r>
-              <a:rPr lang="en-US" sz="2000" dirty="0" err="1"/>
-              <a:t>caracteres</a:t>
-            </a:r>
-            <a:r>
-              <a:rPr lang="en-US" sz="2000" dirty="0"/>
-              <a:t> para o </a:t>
-            </a:r>
-            <a:r>
-              <a:rPr lang="en-US" sz="2000" dirty="0" err="1"/>
-              <a:t>título</a:t>
-            </a:r>
-            <a:r>
-              <a:rPr lang="en-US" sz="2000" dirty="0"/>
-              <a:t> </a:t>
-            </a:r>
-            <a:r>
-              <a:rPr lang="en-US" sz="2000" dirty="0" err="1"/>
-              <a:t>são</a:t>
-            </a:r>
-            <a:r>
-              <a:rPr lang="en-US" sz="2000" dirty="0"/>
-              <a:t> </a:t>
-            </a:r>
-            <a:r>
-              <a:rPr lang="en-US" sz="2000" dirty="0" err="1"/>
-              <a:t>insuficientes</a:t>
-            </a:r>
-            <a:r>
-              <a:rPr lang="en-US" sz="2000" dirty="0"/>
-              <a:t>, </a:t>
-            </a:r>
-            <a:r>
-              <a:rPr lang="en-US" sz="2000" dirty="0" err="1"/>
-              <a:t>aumente</a:t>
-            </a:r>
-            <a:r>
-              <a:rPr lang="en-US" sz="2000" dirty="0"/>
-              <a:t> para 60;</a:t>
+              <a:rPr lang="en-US" sz="2000" dirty="0">
+                <a:ea typeface="Calibri"/>
+                <a:cs typeface="Calibri"/>
+              </a:rPr>
+              <a:t>Use o </a:t>
+            </a:r>
+            <a:r>
+              <a:rPr lang="en-US" sz="2000" dirty="0" err="1">
+                <a:ea typeface="Calibri"/>
+                <a:cs typeface="Calibri"/>
+              </a:rPr>
+              <a:t>Comando</a:t>
+            </a:r>
+            <a:r>
+              <a:rPr lang="en-US" sz="2000" dirty="0">
+                <a:ea typeface="Calibri"/>
+                <a:cs typeface="Calibri"/>
+              </a:rPr>
+              <a:t> SHOW para </a:t>
+            </a:r>
+            <a:r>
+              <a:rPr lang="en-US" sz="2000" dirty="0" err="1">
+                <a:ea typeface="Calibri"/>
+                <a:cs typeface="Calibri"/>
+              </a:rPr>
+              <a:t>mostrar</a:t>
+            </a:r>
+            <a:r>
+              <a:rPr lang="en-US" sz="2000" dirty="0">
+                <a:ea typeface="Calibri"/>
+                <a:cs typeface="Calibri"/>
+              </a:rPr>
+              <a:t> as </a:t>
+            </a:r>
+            <a:r>
+              <a:rPr lang="en-US" sz="2000" dirty="0" err="1">
+                <a:ea typeface="Calibri"/>
+                <a:cs typeface="Calibri"/>
+              </a:rPr>
+              <a:t>informações</a:t>
+            </a:r>
+            <a:r>
+              <a:rPr lang="en-US" sz="2000" dirty="0">
+                <a:ea typeface="Calibri"/>
+                <a:cs typeface="Calibri"/>
+              </a:rPr>
+              <a:t> das </a:t>
+            </a:r>
+            <a:r>
+              <a:rPr lang="en-US" sz="2000" dirty="0" err="1">
+                <a:ea typeface="Calibri"/>
+                <a:cs typeface="Calibri"/>
+              </a:rPr>
+              <a:t>tabelas</a:t>
+            </a:r>
+            <a:r>
+              <a:rPr lang="en-US" sz="2000" dirty="0">
+                <a:ea typeface="Calibri"/>
+                <a:cs typeface="Calibri"/>
+              </a:rPr>
+              <a:t> criadas.</a:t>
             </a:r>
           </a:p>
         </p:txBody>
@@ -6386,7 +6825,7 @@
         <p:cNvPr id="1" name="">
           <a:extLst>
             <a:ext uri="{FF2B5EF4-FFF2-40B4-BE49-F238E27FC236}">
-              <a16:creationId xmlns:a16="http://schemas.microsoft.com/office/drawing/2014/main" id="{B7A19E49-E462-BDC9-428F-B0EF13D0E328}"/>
+              <a16:creationId xmlns:a16="http://schemas.microsoft.com/office/drawing/2014/main" id="{25B5F292-7046-EDD2-8B03-C5A40915B1C7}"/>
             </a:ext>
           </a:extLst>
         </p:cNvPr>
@@ -6406,7 +6845,7 @@
           <p:cNvPr id="5" name="Imagem 4">
             <a:extLst>
               <a:ext uri="{FF2B5EF4-FFF2-40B4-BE49-F238E27FC236}">
-                <a16:creationId xmlns:a16="http://schemas.microsoft.com/office/drawing/2014/main" id="{70A02F65-5CC2-47A4-BD18-AA2E43AB67FC}"/>
+                <a16:creationId xmlns:a16="http://schemas.microsoft.com/office/drawing/2014/main" id="{682051E4-9E9A-DBCE-38C2-BC2D0CE3FFCA}"/>
               </a:ext>
             </a:extLst>
           </p:cNvPr>
@@ -6442,7 +6881,7 @@
           <p:cNvPr id="2" name="CaixaDeTexto 1">
             <a:extLst>
               <a:ext uri="{FF2B5EF4-FFF2-40B4-BE49-F238E27FC236}">
-                <a16:creationId xmlns:a16="http://schemas.microsoft.com/office/drawing/2014/main" id="{2E097277-0FA1-01BE-0D90-CA77001EF4A7}"/>
+                <a16:creationId xmlns:a16="http://schemas.microsoft.com/office/drawing/2014/main" id="{3335F6CA-E497-F594-D07E-20E34E7A12B3}"/>
               </a:ext>
             </a:extLst>
           </p:cNvPr>
@@ -6478,7 +6917,7 @@
           <p:cNvPr id="3" name="CaixaDeTexto 2">
             <a:extLst>
               <a:ext uri="{FF2B5EF4-FFF2-40B4-BE49-F238E27FC236}">
-                <a16:creationId xmlns:a16="http://schemas.microsoft.com/office/drawing/2014/main" id="{9ADDB81D-FAE6-589A-65E1-1615071252EA}"/>
+                <a16:creationId xmlns:a16="http://schemas.microsoft.com/office/drawing/2014/main" id="{4699254F-8BC8-68DE-371A-C7B69EB11197}"/>
               </a:ext>
             </a:extLst>
           </p:cNvPr>
@@ -6488,7 +6927,7 @@
         <p:spPr>
           <a:xfrm>
             <a:off x="1459523" y="1011115"/>
-            <a:ext cx="8976946" cy="4093428"/>
+            <a:ext cx="8976946" cy="4708981"/>
           </a:xfrm>
           <a:prstGeom prst="rect">
             <a:avLst/>
@@ -6496,400 +6935,789 @@
           <a:noFill/>
         </p:spPr>
         <p:txBody>
-          <a:bodyPr wrap="square" rtlCol="0">
+          <a:bodyPr wrap="square" lIns="91440" tIns="45720" rIns="91440" bIns="45720" rtlCol="0" anchor="t">
             <a:spAutoFit/>
           </a:bodyPr>
           <a:lstStyle/>
           <a:p>
             <a:r>
-              <a:rPr lang="en-US" sz="2000" dirty="0" err="1"/>
-              <a:t>Utilizando</a:t>
-            </a:r>
-            <a:r>
-              <a:rPr lang="en-US" sz="2000" dirty="0"/>
+              <a:rPr lang="en-US" sz="2000" dirty="0" err="1">
+                <a:ea typeface="Calibri"/>
+                <a:cs typeface="Calibri"/>
+              </a:rPr>
+              <a:t>Aluno</a:t>
+            </a:r>
+            <a:r>
+              <a:rPr lang="en-US" sz="2000" dirty="0">
+                <a:ea typeface="Calibri"/>
+                <a:cs typeface="Calibri"/>
+              </a:rPr>
+              <a:t>: id, </a:t>
+            </a:r>
+            <a:r>
+              <a:rPr lang="en-US" sz="2000" dirty="0" err="1">
+                <a:ea typeface="Calibri"/>
+                <a:cs typeface="Calibri"/>
+              </a:rPr>
+              <a:t>nome</a:t>
+            </a:r>
+            <a:r>
+              <a:rPr lang="en-US" sz="2000" dirty="0">
+                <a:ea typeface="Calibri"/>
+                <a:cs typeface="Calibri"/>
+              </a:rPr>
+              <a:t>, </a:t>
+            </a:r>
+            <a:r>
+              <a:rPr lang="en-US" sz="2000" dirty="0" err="1">
+                <a:ea typeface="Calibri"/>
+                <a:cs typeface="Calibri"/>
+              </a:rPr>
+              <a:t>cpf</a:t>
+            </a:r>
+            <a:r>
+              <a:rPr lang="en-US" sz="2000" dirty="0">
+                <a:ea typeface="Calibri"/>
+                <a:cs typeface="Calibri"/>
+              </a:rPr>
+              <a:t>, email, </a:t>
+            </a:r>
+            <a:r>
+              <a:rPr lang="en-US" sz="2000" dirty="0" err="1">
+                <a:ea typeface="Calibri"/>
+                <a:cs typeface="Calibri"/>
+              </a:rPr>
+              <a:t>data_nascimento</a:t>
+            </a:r>
+            <a:r>
+              <a:rPr lang="en-US" sz="2000" dirty="0">
+                <a:ea typeface="Calibri"/>
+                <a:cs typeface="Calibri"/>
+              </a:rPr>
+              <a:t> e </a:t>
+            </a:r>
+            <a:r>
+              <a:rPr lang="en-US" sz="2000" dirty="0" err="1">
+                <a:ea typeface="Calibri"/>
+                <a:cs typeface="Calibri"/>
+              </a:rPr>
+              <a:t>matrícula</a:t>
+            </a:r>
+            <a:r>
+              <a:rPr lang="en-US" sz="2000" dirty="0">
+                <a:ea typeface="Calibri"/>
+                <a:cs typeface="Calibri"/>
+              </a:rPr>
+              <a:t>;</a:t>
+            </a:r>
+          </a:p>
+          <a:p>
+            <a:r>
+              <a:rPr lang="en-US" sz="2000" dirty="0" err="1">
+                <a:ea typeface="Calibri"/>
+                <a:cs typeface="Calibri"/>
+              </a:rPr>
+              <a:t>Curso</a:t>
+            </a:r>
+            <a:r>
+              <a:rPr lang="en-US" sz="2000" dirty="0">
+                <a:ea typeface="Calibri"/>
+                <a:cs typeface="Calibri"/>
+              </a:rPr>
+              <a:t>: id, </a:t>
+            </a:r>
+            <a:r>
+              <a:rPr lang="en-US" sz="2000" dirty="0" err="1">
+                <a:ea typeface="Calibri"/>
+                <a:cs typeface="Calibri"/>
+              </a:rPr>
+              <a:t>nome</a:t>
+            </a:r>
+            <a:r>
+              <a:rPr lang="en-US" sz="2000" dirty="0">
+                <a:ea typeface="Calibri"/>
+                <a:cs typeface="Calibri"/>
+              </a:rPr>
+              <a:t>, </a:t>
+            </a:r>
+            <a:r>
+              <a:rPr lang="en-US" sz="2000" dirty="0" err="1">
+                <a:ea typeface="Calibri"/>
+                <a:cs typeface="Calibri"/>
+              </a:rPr>
+              <a:t>duração</a:t>
+            </a:r>
+            <a:r>
+              <a:rPr lang="en-US" sz="2000" dirty="0">
+                <a:ea typeface="Calibri"/>
+                <a:cs typeface="Calibri"/>
+              </a:rPr>
+              <a:t> e </a:t>
+            </a:r>
+            <a:r>
+              <a:rPr lang="en-US" sz="2000" dirty="0" err="1">
+                <a:ea typeface="Calibri"/>
+                <a:cs typeface="Calibri"/>
+              </a:rPr>
+              <a:t>modalidade</a:t>
+            </a:r>
+            <a:r>
+              <a:rPr lang="en-US" sz="2000" dirty="0">
+                <a:ea typeface="Calibri"/>
+                <a:cs typeface="Calibri"/>
+              </a:rPr>
+              <a:t>;</a:t>
+            </a:r>
+          </a:p>
+          <a:p>
+            <a:r>
+              <a:rPr lang="en-US" sz="2000" dirty="0">
+                <a:ea typeface="Calibri"/>
+                <a:cs typeface="Calibri"/>
+              </a:rPr>
+              <a:t>Professor: id, </a:t>
+            </a:r>
+            <a:r>
+              <a:rPr lang="en-US" sz="2000" dirty="0" err="1">
+                <a:ea typeface="Calibri"/>
+                <a:cs typeface="Calibri"/>
+              </a:rPr>
+              <a:t>nome</a:t>
+            </a:r>
+            <a:r>
+              <a:rPr lang="en-US" sz="2000" dirty="0">
+                <a:ea typeface="Calibri"/>
+                <a:cs typeface="Calibri"/>
+              </a:rPr>
+              <a:t>, </a:t>
+            </a:r>
+            <a:r>
+              <a:rPr lang="en-US" sz="2000" dirty="0" err="1">
+                <a:ea typeface="Calibri"/>
+                <a:cs typeface="Calibri"/>
+              </a:rPr>
+              <a:t>cpf</a:t>
+            </a:r>
+            <a:r>
+              <a:rPr lang="en-US" sz="2000" dirty="0">
+                <a:ea typeface="Calibri"/>
+                <a:cs typeface="Calibri"/>
+              </a:rPr>
+              <a:t>, email;</a:t>
+            </a:r>
+          </a:p>
+          <a:p>
+            <a:r>
+              <a:rPr lang="en-US" sz="2000" dirty="0" err="1">
+                <a:ea typeface="Calibri"/>
+                <a:cs typeface="Calibri"/>
+              </a:rPr>
+              <a:t>Disciplina</a:t>
+            </a:r>
+            <a:r>
+              <a:rPr lang="en-US" sz="2000" dirty="0">
+                <a:ea typeface="Calibri"/>
+                <a:cs typeface="Calibri"/>
+              </a:rPr>
+              <a:t>: id, </a:t>
+            </a:r>
+            <a:r>
+              <a:rPr lang="en-US" sz="2000" dirty="0" err="1">
+                <a:ea typeface="Calibri"/>
+                <a:cs typeface="Calibri"/>
+              </a:rPr>
+              <a:t>nome</a:t>
+            </a:r>
+            <a:r>
+              <a:rPr lang="en-US" sz="2000" dirty="0">
+                <a:ea typeface="Calibri"/>
+                <a:cs typeface="Calibri"/>
+              </a:rPr>
+              <a:t>, </a:t>
+            </a:r>
+            <a:r>
+              <a:rPr lang="en-US" sz="2000" dirty="0" err="1">
+                <a:ea typeface="Calibri"/>
+                <a:cs typeface="Calibri"/>
+              </a:rPr>
+              <a:t>carga_horária</a:t>
+            </a:r>
+            <a:r>
+              <a:rPr lang="en-US" sz="2000" dirty="0">
+                <a:ea typeface="Calibri"/>
+                <a:cs typeface="Calibri"/>
+              </a:rPr>
+              <a:t>, </a:t>
+            </a:r>
+            <a:r>
+              <a:rPr lang="en-US" sz="2000" dirty="0" err="1">
+                <a:ea typeface="Calibri"/>
+                <a:cs typeface="Calibri"/>
+              </a:rPr>
+              <a:t>id_curso</a:t>
+            </a:r>
+            <a:r>
+              <a:rPr lang="en-US" sz="2000" dirty="0">
+                <a:ea typeface="Calibri"/>
+                <a:cs typeface="Calibri"/>
+              </a:rPr>
+              <a:t>, </a:t>
+            </a:r>
+            <a:r>
+              <a:rPr lang="en-US" sz="2000" dirty="0" err="1">
+                <a:ea typeface="Calibri"/>
+                <a:cs typeface="Calibri"/>
+              </a:rPr>
+              <a:t>id_professor</a:t>
+            </a:r>
+            <a:r>
+              <a:rPr lang="en-US" sz="2000" dirty="0">
+                <a:ea typeface="Calibri"/>
+                <a:cs typeface="Calibri"/>
+              </a:rPr>
+              <a:t>;</a:t>
+            </a:r>
+          </a:p>
+          <a:p>
+            <a:r>
+              <a:rPr lang="en-US" sz="2000" dirty="0" err="1">
+                <a:ea typeface="Calibri"/>
+                <a:cs typeface="Calibri"/>
+              </a:rPr>
+              <a:t>Matrícula</a:t>
+            </a:r>
+            <a:r>
+              <a:rPr lang="en-US" sz="2000" dirty="0">
+                <a:ea typeface="Calibri"/>
+                <a:cs typeface="Calibri"/>
+              </a:rPr>
+              <a:t>: id, </a:t>
+            </a:r>
+            <a:r>
+              <a:rPr lang="en-US" sz="2000" dirty="0" err="1">
+                <a:ea typeface="Calibri"/>
+                <a:cs typeface="Calibri"/>
+              </a:rPr>
+              <a:t>id_aluno</a:t>
+            </a:r>
+            <a:r>
+              <a:rPr lang="en-US" sz="2000" dirty="0">
+                <a:ea typeface="Calibri"/>
+                <a:cs typeface="Calibri"/>
+              </a:rPr>
+              <a:t>, </a:t>
+            </a:r>
+            <a:r>
+              <a:rPr lang="en-US" sz="2000" dirty="0" err="1">
+                <a:ea typeface="Calibri"/>
+                <a:cs typeface="Calibri"/>
+              </a:rPr>
+              <a:t>id_disciplina</a:t>
+            </a:r>
+            <a:r>
+              <a:rPr lang="en-US" sz="2000" dirty="0">
+                <a:ea typeface="Calibri"/>
+                <a:cs typeface="Calibri"/>
+              </a:rPr>
+              <a:t>, </a:t>
+            </a:r>
+            <a:r>
+              <a:rPr lang="en-US" sz="2000" dirty="0" err="1">
+                <a:ea typeface="Calibri"/>
+                <a:cs typeface="Calibri"/>
+              </a:rPr>
+              <a:t>data_matricula</a:t>
+            </a:r>
+            <a:r>
+              <a:rPr lang="en-US" sz="2000" dirty="0">
+                <a:ea typeface="Calibri"/>
+                <a:cs typeface="Calibri"/>
+              </a:rPr>
+              <a:t>, status.</a:t>
+            </a:r>
+          </a:p>
+          <a:p>
+            <a:endParaRPr lang="en-US" sz="2000" dirty="0">
+              <a:ea typeface="Calibri"/>
+              <a:cs typeface="Calibri"/>
+            </a:endParaRPr>
+          </a:p>
+          <a:p>
+            <a:r>
+              <a:rPr lang="en-US" sz="2000" dirty="0" err="1">
+                <a:ea typeface="Calibri"/>
+                <a:cs typeface="Calibri"/>
+              </a:rPr>
+              <a:t>Considerações</a:t>
+            </a:r>
+            <a:r>
+              <a:rPr lang="en-US" sz="2000" dirty="0">
+                <a:ea typeface="Calibri"/>
+                <a:cs typeface="Calibri"/>
+              </a:rPr>
               <a:t> </a:t>
             </a:r>
             <a:r>
-              <a:rPr lang="en-US" sz="2000" dirty="0" err="1"/>
-              <a:t>os</a:t>
-            </a:r>
-            <a:r>
-              <a:rPr lang="en-US" sz="2000" dirty="0"/>
+              <a:rPr lang="en-US" sz="2000" dirty="0" err="1">
+                <a:ea typeface="Calibri"/>
+                <a:cs typeface="Calibri"/>
+              </a:rPr>
+              <a:t>Importantes</a:t>
+            </a:r>
+            <a:r>
+              <a:rPr lang="en-US" sz="2000" dirty="0">
+                <a:ea typeface="Calibri"/>
+                <a:cs typeface="Calibri"/>
+              </a:rPr>
+              <a:t>:</a:t>
+            </a:r>
+          </a:p>
+          <a:p>
+            <a:endParaRPr lang="en-US" sz="2000" dirty="0">
+              <a:ea typeface="Calibri"/>
+              <a:cs typeface="Calibri"/>
+            </a:endParaRPr>
+          </a:p>
+          <a:p>
+            <a:pPr marL="342900" indent="-342900">
+              <a:buFont typeface="Calibri"/>
+              <a:buChar char="-"/>
+            </a:pPr>
+            <a:r>
+              <a:rPr lang="en-US" sz="2000" dirty="0">
+                <a:ea typeface="Calibri"/>
+                <a:cs typeface="Calibri"/>
+              </a:rPr>
+              <a:t>CPF e e-mail </a:t>
+            </a:r>
+            <a:r>
+              <a:rPr lang="en-US" sz="2000" dirty="0" err="1">
+                <a:ea typeface="Calibri"/>
+                <a:cs typeface="Calibri"/>
+              </a:rPr>
+              <a:t>não</a:t>
+            </a:r>
+            <a:r>
+              <a:rPr lang="en-US" sz="2000" dirty="0">
+                <a:ea typeface="Calibri"/>
+                <a:cs typeface="Calibri"/>
+              </a:rPr>
               <a:t> </a:t>
             </a:r>
             <a:r>
-              <a:rPr lang="en-US" sz="2000" dirty="0" err="1"/>
-              <a:t>conceitos</a:t>
-            </a:r>
-            <a:r>
-              <a:rPr lang="en-US" sz="2000" dirty="0"/>
+              <a:rPr lang="en-US" sz="2000" dirty="0" err="1">
+                <a:ea typeface="Calibri"/>
+                <a:cs typeface="Calibri"/>
+              </a:rPr>
+              <a:t>podem</a:t>
+            </a:r>
+            <a:r>
+              <a:rPr lang="en-US" sz="2000" dirty="0">
+                <a:ea typeface="Calibri"/>
+                <a:cs typeface="Calibri"/>
+              </a:rPr>
+              <a:t> ser </a:t>
+            </a:r>
+            <a:r>
+              <a:rPr lang="en-US" sz="2000" dirty="0" err="1">
+                <a:ea typeface="Calibri"/>
+                <a:cs typeface="Calibri"/>
+              </a:rPr>
+              <a:t>duplicados</a:t>
+            </a:r>
+            <a:r>
+              <a:rPr lang="en-US" sz="2000" dirty="0">
+                <a:ea typeface="Calibri"/>
+                <a:cs typeface="Calibri"/>
+              </a:rPr>
+              <a:t>;</a:t>
+            </a:r>
+          </a:p>
+          <a:p>
+            <a:pPr marL="342900" indent="-342900">
+              <a:buFont typeface="Calibri"/>
+              <a:buChar char="-"/>
+            </a:pPr>
+            <a:r>
+              <a:rPr lang="en-US" sz="2000" dirty="0">
+                <a:ea typeface="Calibri"/>
+                <a:cs typeface="Calibri"/>
+              </a:rPr>
+              <a:t>Campos </a:t>
+            </a:r>
+            <a:r>
+              <a:rPr lang="en-US" sz="2000" dirty="0" err="1">
+                <a:ea typeface="Calibri"/>
+                <a:cs typeface="Calibri"/>
+              </a:rPr>
+              <a:t>Obrigatórios</a:t>
+            </a:r>
+            <a:r>
+              <a:rPr lang="en-US" sz="2000" dirty="0">
+                <a:ea typeface="Calibri"/>
+                <a:cs typeface="Calibri"/>
+              </a:rPr>
               <a:t> </a:t>
             </a:r>
             <a:r>
-              <a:rPr lang="en-US" sz="2000" dirty="0" err="1"/>
-              <a:t>abordados</a:t>
-            </a:r>
-            <a:r>
-              <a:rPr lang="en-US" sz="2000" dirty="0"/>
+              <a:rPr lang="en-US" sz="2000" dirty="0" err="1">
+                <a:ea typeface="Calibri"/>
+                <a:cs typeface="Calibri"/>
+              </a:rPr>
+              <a:t>não</a:t>
+            </a:r>
+            <a:r>
+              <a:rPr lang="en-US" sz="2000" dirty="0">
+                <a:ea typeface="Calibri"/>
+                <a:cs typeface="Calibri"/>
+              </a:rPr>
               <a:t> </a:t>
             </a:r>
             <a:r>
-              <a:rPr lang="en-US" sz="2000" dirty="0" err="1"/>
-              <a:t>nesta</a:t>
-            </a:r>
-            <a:r>
-              <a:rPr lang="en-US" sz="2000" dirty="0"/>
-              <a:t> aula, </a:t>
-            </a:r>
-            <a:r>
-              <a:rPr lang="en-US" sz="2000" dirty="0" err="1"/>
-              <a:t>faça</a:t>
-            </a:r>
-            <a:r>
-              <a:rPr lang="en-US" sz="2000" dirty="0"/>
-              <a:t> o que se </a:t>
-            </a:r>
-            <a:r>
-              <a:rPr lang="en-US" sz="2000" dirty="0" err="1"/>
-              <a:t>pede</a:t>
-            </a:r>
-            <a:r>
-              <a:rPr lang="en-US" sz="2000" dirty="0"/>
-              <a:t>:</a:t>
-            </a:r>
-          </a:p>
-          <a:p>
-            <a:endParaRPr lang="en-US" sz="2000" dirty="0"/>
-          </a:p>
-          <a:p>
-            <a:r>
-              <a:rPr lang="en-US" sz="2000" dirty="0"/>
-              <a:t>4.   </a:t>
-            </a:r>
-            <a:r>
-              <a:rPr lang="en-US" sz="2000" dirty="0" err="1"/>
-              <a:t>Operação</a:t>
-            </a:r>
-            <a:r>
-              <a:rPr lang="en-US" sz="2000" dirty="0"/>
-              <a:t> de Dados:</a:t>
+              <a:rPr lang="en-US" sz="2000" dirty="0" err="1">
+                <a:ea typeface="Calibri"/>
+                <a:cs typeface="Calibri"/>
+              </a:rPr>
+              <a:t>podem</a:t>
+            </a:r>
+            <a:r>
+              <a:rPr lang="en-US" sz="2000" dirty="0">
+                <a:ea typeface="Calibri"/>
+                <a:cs typeface="Calibri"/>
+              </a:rPr>
+              <a:t> ser </a:t>
+            </a:r>
+            <a:r>
+              <a:rPr lang="en-US" sz="2000" dirty="0" err="1">
+                <a:ea typeface="Calibri"/>
+                <a:cs typeface="Calibri"/>
+              </a:rPr>
+              <a:t>nulos</a:t>
+            </a:r>
+            <a:r>
+              <a:rPr lang="en-US" sz="2000" dirty="0">
+                <a:ea typeface="Calibri"/>
+                <a:cs typeface="Calibri"/>
+              </a:rPr>
+              <a:t>;</a:t>
             </a:r>
           </a:p>
           <a:p>
             <a:pPr marL="342900" indent="-342900">
-              <a:buFont typeface="Arial" panose="020B0604020202020204" pitchFamily="34" charset="0"/>
-              <a:buChar char="•"/>
+              <a:buFont typeface="Calibri"/>
+              <a:buChar char="-"/>
             </a:pPr>
             <a:r>
-              <a:rPr lang="en-US" sz="2000" dirty="0" err="1"/>
-              <a:t>Faça</a:t>
-            </a:r>
-            <a:r>
-              <a:rPr lang="en-US" sz="2000" dirty="0"/>
-              <a:t> a </a:t>
-            </a:r>
-            <a:r>
-              <a:rPr lang="en-US" sz="2000" dirty="0" err="1"/>
-              <a:t>inserção</a:t>
-            </a:r>
-            <a:r>
-              <a:rPr lang="en-US" sz="2000" dirty="0"/>
-              <a:t> de 3 </a:t>
-            </a:r>
-            <a:r>
-              <a:rPr lang="en-US" sz="2000" dirty="0" err="1"/>
-              <a:t>filmes</a:t>
-            </a:r>
-            <a:r>
-              <a:rPr lang="en-US" sz="2000" dirty="0"/>
+              <a:rPr lang="en-US" sz="2000" dirty="0" err="1">
+                <a:ea typeface="Calibri"/>
+                <a:cs typeface="Calibri"/>
+              </a:rPr>
+              <a:t>Modalidade</a:t>
+            </a:r>
+            <a:r>
+              <a:rPr lang="en-US" sz="2000" dirty="0">
+                <a:ea typeface="Calibri"/>
+                <a:cs typeface="Calibri"/>
+              </a:rPr>
+              <a:t> </a:t>
+            </a:r>
+            <a:r>
+              <a:rPr lang="en-US" sz="2000" dirty="0" err="1">
+                <a:ea typeface="Calibri"/>
+                <a:cs typeface="Calibri"/>
+              </a:rPr>
+              <a:t>deve</a:t>
+            </a:r>
+            <a:r>
+              <a:rPr lang="en-US" sz="2000" dirty="0">
+                <a:ea typeface="Calibri"/>
+                <a:cs typeface="Calibri"/>
+              </a:rPr>
+              <a:t> </a:t>
+            </a:r>
+            <a:r>
+              <a:rPr lang="en-US" sz="2000" dirty="0" err="1">
+                <a:ea typeface="Calibri"/>
+                <a:cs typeface="Calibri"/>
+              </a:rPr>
+              <a:t>aceitar</a:t>
+            </a:r>
+            <a:r>
+              <a:rPr lang="en-US" sz="2000" dirty="0">
+                <a:ea typeface="Calibri"/>
+                <a:cs typeface="Calibri"/>
+              </a:rPr>
+              <a:t> </a:t>
+            </a:r>
+            <a:r>
+              <a:rPr lang="en-US" sz="2000" dirty="0" err="1">
+                <a:ea typeface="Calibri"/>
+                <a:cs typeface="Calibri"/>
+              </a:rPr>
+              <a:t>apenas</a:t>
+            </a:r>
+            <a:r>
+              <a:rPr lang="en-US" sz="2000" dirty="0">
+                <a:ea typeface="Calibri"/>
+                <a:cs typeface="Calibri"/>
+              </a:rPr>
+              <a:t>: </a:t>
+            </a:r>
+            <a:r>
+              <a:rPr lang="en-US" sz="2000" dirty="0" err="1">
+                <a:ea typeface="Calibri"/>
+                <a:cs typeface="Calibri"/>
+              </a:rPr>
+              <a:t>Presencial</a:t>
+            </a:r>
+            <a:r>
+              <a:rPr lang="en-US" sz="2000" dirty="0">
+                <a:ea typeface="Calibri"/>
+                <a:cs typeface="Calibri"/>
+              </a:rPr>
+              <a:t>, EAD </a:t>
+            </a:r>
+            <a:r>
+              <a:rPr lang="en-US" sz="2000" dirty="0" err="1">
+                <a:ea typeface="Calibri"/>
+                <a:cs typeface="Calibri"/>
+              </a:rPr>
+              <a:t>ou</a:t>
+            </a:r>
+            <a:r>
+              <a:rPr lang="en-US" sz="2000" dirty="0">
+                <a:ea typeface="Calibri"/>
+                <a:cs typeface="Calibri"/>
+              </a:rPr>
+              <a:t> </a:t>
+            </a:r>
+            <a:r>
+              <a:rPr lang="en-US" sz="2000" dirty="0" err="1">
+                <a:ea typeface="Calibri"/>
+                <a:cs typeface="Calibri"/>
+              </a:rPr>
+              <a:t>Híbrido</a:t>
+            </a:r>
+            <a:r>
+              <a:rPr lang="en-US" sz="2000" dirty="0">
+                <a:ea typeface="Calibri"/>
+                <a:cs typeface="Calibri"/>
+              </a:rPr>
               <a:t>;</a:t>
             </a:r>
           </a:p>
           <a:p>
             <a:pPr marL="342900" indent="-342900">
-              <a:buFont typeface="Arial" panose="020B0604020202020204" pitchFamily="34" charset="0"/>
-              <a:buChar char="•"/>
+              <a:buFont typeface="Calibri"/>
+              <a:buChar char="-"/>
             </a:pPr>
             <a:r>
-              <a:rPr lang="en-US" sz="2000" dirty="0" err="1"/>
-              <a:t>Desative</a:t>
-            </a:r>
-            <a:r>
-              <a:rPr lang="en-US" sz="2000" dirty="0"/>
-              <a:t> a </a:t>
-            </a:r>
-            <a:r>
-              <a:rPr lang="en-US" sz="2000" dirty="0" err="1"/>
-              <a:t>trava</a:t>
-            </a:r>
-            <a:r>
-              <a:rPr lang="en-US" sz="2000" dirty="0"/>
+              <a:rPr lang="en-US" sz="2000" dirty="0" err="1">
+                <a:ea typeface="Calibri"/>
+                <a:cs typeface="Calibri"/>
+              </a:rPr>
+              <a:t>Carga_horária</a:t>
+            </a:r>
+            <a:r>
+              <a:rPr lang="en-US" sz="2000" dirty="0">
+                <a:ea typeface="Calibri"/>
+                <a:cs typeface="Calibri"/>
+              </a:rPr>
+              <a:t> </a:t>
+            </a:r>
+            <a:r>
+              <a:rPr lang="en-US" sz="2000" dirty="0" err="1">
+                <a:ea typeface="Calibri"/>
+                <a:cs typeface="Calibri"/>
+              </a:rPr>
+              <a:t>deve</a:t>
+            </a:r>
+            <a:r>
+              <a:rPr lang="en-US" sz="2000" dirty="0">
+                <a:ea typeface="Calibri"/>
+                <a:cs typeface="Calibri"/>
+              </a:rPr>
+              <a:t> ser </a:t>
+            </a:r>
+            <a:r>
+              <a:rPr lang="en-US" sz="2000" dirty="0" err="1">
+                <a:ea typeface="Calibri"/>
+                <a:cs typeface="Calibri"/>
+              </a:rPr>
+              <a:t>maior</a:t>
+            </a:r>
+            <a:r>
+              <a:rPr lang="en-US" sz="2000" dirty="0">
+                <a:ea typeface="Calibri"/>
+                <a:cs typeface="Calibri"/>
+              </a:rPr>
+              <a:t> do </a:t>
+            </a:r>
+            <a:r>
+              <a:rPr lang="en-US" sz="2000" dirty="0" err="1">
+                <a:ea typeface="Calibri"/>
+                <a:cs typeface="Calibri"/>
+              </a:rPr>
+              <a:t>que</a:t>
+            </a:r>
+            <a:r>
+              <a:rPr lang="en-US" sz="2000" dirty="0">
+                <a:ea typeface="Calibri"/>
+                <a:cs typeface="Calibri"/>
+              </a:rPr>
+              <a:t> zero;</a:t>
+            </a:r>
+          </a:p>
+          <a:p>
+            <a:pPr marL="342900" indent="-342900">
+              <a:buFont typeface="Calibri"/>
+              <a:buChar char="-"/>
+            </a:pPr>
+            <a:r>
+              <a:rPr lang="en-US" sz="2000" dirty="0" err="1">
+                <a:ea typeface="Calibri"/>
+                <a:cs typeface="Calibri"/>
+              </a:rPr>
+              <a:t>Data_matrícula</a:t>
+            </a:r>
+            <a:r>
+              <a:rPr lang="en-US" sz="2000" dirty="0">
+                <a:ea typeface="Calibri"/>
+                <a:cs typeface="Calibri"/>
+              </a:rPr>
+              <a:t> </a:t>
+            </a:r>
+            <a:r>
+              <a:rPr lang="en-US" sz="2000" dirty="0" err="1">
+                <a:ea typeface="Calibri"/>
+                <a:cs typeface="Calibri"/>
+              </a:rPr>
+              <a:t>deve</a:t>
+            </a:r>
+            <a:r>
+              <a:rPr lang="en-US" sz="2000" dirty="0">
+                <a:ea typeface="Calibri"/>
+                <a:cs typeface="Calibri"/>
+              </a:rPr>
+              <a:t> </a:t>
+            </a:r>
+            <a:r>
+              <a:rPr lang="en-US" sz="2000" dirty="0" err="1">
+                <a:ea typeface="Calibri"/>
+                <a:cs typeface="Calibri"/>
+              </a:rPr>
+              <a:t>possuir</a:t>
+            </a:r>
+            <a:r>
+              <a:rPr lang="en-US" sz="2000" dirty="0">
+                <a:ea typeface="Calibri"/>
+                <a:cs typeface="Calibri"/>
+              </a:rPr>
+              <a:t> um valor </a:t>
+            </a:r>
+            <a:r>
+              <a:rPr lang="en-US" sz="2000" dirty="0" err="1">
+                <a:ea typeface="Calibri"/>
+                <a:cs typeface="Calibri"/>
+              </a:rPr>
+              <a:t>padrão</a:t>
+            </a:r>
+            <a:r>
+              <a:rPr lang="en-US" sz="2000" dirty="0">
+                <a:ea typeface="Calibri"/>
+                <a:cs typeface="Calibri"/>
+              </a:rPr>
+              <a:t>;</a:t>
+            </a:r>
+          </a:p>
+          <a:p>
+            <a:pPr marL="342900" indent="-342900">
+              <a:buFont typeface="Calibri"/>
+              <a:buChar char="-"/>
+            </a:pPr>
+            <a:r>
+              <a:rPr lang="en-US" sz="2000" dirty="0" err="1">
+                <a:ea typeface="Calibri"/>
+                <a:cs typeface="Calibri"/>
+              </a:rPr>
+              <a:t>Não</a:t>
+            </a:r>
+            <a:r>
+              <a:rPr lang="en-US" sz="2000" dirty="0">
+                <a:ea typeface="Calibri"/>
+                <a:cs typeface="Calibri"/>
+              </a:rPr>
+              <a:t> </a:t>
+            </a:r>
+            <a:r>
+              <a:rPr lang="en-US" sz="2000" dirty="0" err="1">
+                <a:ea typeface="Calibri"/>
+                <a:cs typeface="Calibri"/>
+              </a:rPr>
+              <a:t>esquecer</a:t>
+            </a:r>
+            <a:r>
+              <a:rPr lang="en-US" sz="2000" dirty="0">
+                <a:ea typeface="Calibri"/>
+                <a:cs typeface="Calibri"/>
+              </a:rPr>
               <a:t> de </a:t>
             </a:r>
             <a:r>
-              <a:rPr lang="en-US" sz="2000" dirty="0" err="1"/>
-              <a:t>segurança</a:t>
-            </a:r>
-            <a:r>
-              <a:rPr lang="en-US" sz="2000" dirty="0"/>
-              <a:t> de updates;</a:t>
-            </a:r>
-          </a:p>
-          <a:p>
-            <a:pPr marL="342900" indent="-342900">
-              <a:buFont typeface="Arial" panose="020B0604020202020204" pitchFamily="34" charset="0"/>
-              <a:buChar char="•"/>
-            </a:pPr>
-            <a:r>
-              <a:rPr lang="en-US" sz="2000" dirty="0" err="1"/>
-              <a:t>Atualize</a:t>
-            </a:r>
-            <a:r>
-              <a:rPr lang="en-US" sz="2000" dirty="0"/>
-              <a:t> o </a:t>
-            </a:r>
-            <a:r>
-              <a:rPr lang="en-US" sz="2000" dirty="0" err="1"/>
-              <a:t>gênero</a:t>
-            </a:r>
-            <a:r>
-              <a:rPr lang="en-US" sz="2000" dirty="0"/>
-              <a:t> de um dos </a:t>
-            </a:r>
-            <a:r>
-              <a:rPr lang="en-US" sz="2000" dirty="0" err="1"/>
-              <a:t>filmes</a:t>
-            </a:r>
-            <a:r>
-              <a:rPr lang="en-US" sz="2000" dirty="0"/>
+              <a:rPr lang="en-US" sz="2000" dirty="0" err="1">
+                <a:ea typeface="Calibri"/>
+                <a:cs typeface="Calibri"/>
+              </a:rPr>
+              <a:t>criar</a:t>
+            </a:r>
+            <a:r>
+              <a:rPr lang="en-US" sz="2000" dirty="0">
+                <a:ea typeface="Calibri"/>
+                <a:cs typeface="Calibri"/>
+              </a:rPr>
+              <a:t> as Chaves </a:t>
+            </a:r>
+            <a:r>
+              <a:rPr lang="en-US" sz="2000" dirty="0" err="1">
+                <a:ea typeface="Calibri"/>
+                <a:cs typeface="Calibri"/>
+              </a:rPr>
+              <a:t>Estrangeiras</a:t>
+            </a:r>
+            <a:r>
+              <a:rPr lang="en-US" sz="2000" dirty="0">
+                <a:ea typeface="Calibri"/>
+                <a:cs typeface="Calibri"/>
+              </a:rPr>
               <a:t> </a:t>
             </a:r>
             <a:r>
-              <a:rPr lang="en-US" sz="2000" dirty="0" err="1"/>
-              <a:t>inseridos</a:t>
-            </a:r>
-            <a:r>
-              <a:rPr lang="en-US" sz="2000" dirty="0"/>
-              <a:t>;</a:t>
-            </a:r>
-          </a:p>
-          <a:p>
-            <a:pPr marL="342900" indent="-342900">
-              <a:buFont typeface="Arial" panose="020B0604020202020204" pitchFamily="34" charset="0"/>
-              <a:buChar char="•"/>
-            </a:pPr>
-            <a:r>
-              <a:rPr lang="en-US" sz="2000" dirty="0"/>
-              <a:t>Delete </a:t>
-            </a:r>
-            <a:r>
-              <a:rPr lang="en-US" sz="2000" dirty="0" err="1"/>
-              <a:t>apenas</a:t>
-            </a:r>
-            <a:r>
-              <a:rPr lang="en-US" sz="2000" dirty="0"/>
-              <a:t> o </a:t>
-            </a:r>
-            <a:r>
-              <a:rPr lang="en-US" sz="2000" dirty="0" err="1"/>
-              <a:t>filme</a:t>
-            </a:r>
-            <a:r>
-              <a:rPr lang="en-US" sz="2000" dirty="0"/>
-              <a:t> </a:t>
-            </a:r>
-            <a:r>
-              <a:rPr lang="en-US" sz="2000" dirty="0" err="1"/>
-              <a:t>que</a:t>
-            </a:r>
-            <a:r>
-              <a:rPr lang="en-US" sz="2000" dirty="0"/>
-              <a:t> </a:t>
-            </a:r>
-            <a:r>
-              <a:rPr lang="en-US" sz="2000" dirty="0" err="1"/>
-              <a:t>tiver</a:t>
-            </a:r>
-            <a:r>
-              <a:rPr lang="en-US" sz="2000" dirty="0"/>
-              <a:t> o </a:t>
-            </a:r>
-            <a:r>
-              <a:rPr lang="en-US" sz="2000" dirty="0" err="1"/>
-              <a:t>primeiro</a:t>
-            </a:r>
-            <a:r>
-              <a:rPr lang="en-US" sz="2000" dirty="0"/>
-              <a:t> ID;</a:t>
-            </a:r>
-          </a:p>
-          <a:p>
-            <a:pPr marL="342900" indent="-342900">
-              <a:buFont typeface="Arial" panose="020B0604020202020204" pitchFamily="34" charset="0"/>
-              <a:buChar char="•"/>
-            </a:pPr>
-            <a:r>
-              <a:rPr lang="en-US" sz="2000" dirty="0" err="1"/>
-              <a:t>Mostre</a:t>
-            </a:r>
-            <a:r>
-              <a:rPr lang="en-US" sz="2000" dirty="0"/>
-              <a:t> </a:t>
-            </a:r>
-            <a:r>
-              <a:rPr lang="en-US" sz="2000" dirty="0" err="1"/>
-              <a:t>todos</a:t>
-            </a:r>
-            <a:r>
-              <a:rPr lang="en-US" sz="2000" dirty="0"/>
-              <a:t> </a:t>
-            </a:r>
-            <a:r>
-              <a:rPr lang="en-US" sz="2000" dirty="0" err="1"/>
-              <a:t>os</a:t>
-            </a:r>
-            <a:r>
-              <a:rPr lang="en-US" sz="2000" dirty="0"/>
-              <a:t> dados da </a:t>
-            </a:r>
-            <a:r>
-              <a:rPr lang="en-US" sz="2000" dirty="0" err="1"/>
-              <a:t>tabela</a:t>
-            </a:r>
-            <a:r>
-              <a:rPr lang="en-US" sz="2000" dirty="0"/>
-              <a:t> para </a:t>
-            </a:r>
-            <a:r>
-              <a:rPr lang="en-US" sz="2000" dirty="0" err="1"/>
-              <a:t>validar</a:t>
-            </a:r>
-            <a:r>
-              <a:rPr lang="en-US" sz="2000" dirty="0"/>
-              <a:t> as </a:t>
-            </a:r>
-            <a:r>
-              <a:rPr lang="en-US" sz="2000" dirty="0" err="1"/>
-              <a:t>operações</a:t>
-            </a:r>
-            <a:r>
-              <a:rPr lang="en-US" sz="2000" dirty="0"/>
+              <a:rPr lang="en-US" sz="2000" dirty="0" err="1">
+                <a:ea typeface="Calibri"/>
+                <a:cs typeface="Calibri"/>
+              </a:rPr>
+              <a:t>corretamente</a:t>
+            </a:r>
+            <a:r>
+              <a:rPr lang="en-US" sz="2000" dirty="0">
+                <a:ea typeface="Calibri"/>
+                <a:cs typeface="Calibri"/>
+              </a:rPr>
               <a:t>.</a:t>
             </a:r>
           </a:p>
           <a:p>
-            <a:r>
-              <a:rPr lang="en-US" sz="2000" dirty="0"/>
-              <a:t>OBS: </a:t>
-            </a:r>
-            <a:r>
-              <a:rPr lang="en-US" sz="2000" dirty="0" err="1"/>
-              <a:t>Não</a:t>
-            </a:r>
-            <a:r>
-              <a:rPr lang="en-US" sz="2000" dirty="0"/>
-              <a:t> se </a:t>
-            </a:r>
-            <a:r>
-              <a:rPr lang="en-US" sz="2000" dirty="0" err="1"/>
-              <a:t>esqueça</a:t>
-            </a:r>
-            <a:r>
-              <a:rPr lang="en-US" sz="2000" dirty="0"/>
-              <a:t> de usar SET SQL_SAFE_UPDATES = 0.</a:t>
-            </a:r>
-          </a:p>
-          <a:p>
-            <a:endParaRPr lang="en-US" sz="2000" dirty="0"/>
-          </a:p>
-          <a:p>
-            <a:r>
-              <a:rPr lang="en-US" sz="2000" dirty="0"/>
-              <a:t>5. </a:t>
-            </a:r>
-            <a:r>
-              <a:rPr lang="en-US" sz="2000" dirty="0" err="1"/>
-              <a:t>Finalização</a:t>
-            </a:r>
-            <a:r>
-              <a:rPr lang="en-US" sz="2000" dirty="0"/>
-              <a:t>:</a:t>
-            </a:r>
-          </a:p>
-          <a:p>
-            <a:pPr marL="342900" indent="-342900">
-              <a:buFont typeface="Arial" panose="020B0604020202020204" pitchFamily="34" charset="0"/>
-              <a:buChar char="•"/>
-            </a:pPr>
-            <a:r>
-              <a:rPr lang="en-US" sz="2000" dirty="0"/>
-              <a:t>Use o commando SHOW para </a:t>
-            </a:r>
-            <a:r>
-              <a:rPr lang="en-US" sz="2000" dirty="0" err="1"/>
-              <a:t>visualizar</a:t>
-            </a:r>
-            <a:r>
-              <a:rPr lang="en-US" sz="2000" dirty="0"/>
-              <a:t> as </a:t>
-            </a:r>
-            <a:r>
-              <a:rPr lang="en-US" sz="2000" dirty="0" err="1"/>
-              <a:t>tabelas</a:t>
-            </a:r>
-            <a:r>
-              <a:rPr lang="en-US" sz="2000" dirty="0"/>
-              <a:t>;</a:t>
-            </a:r>
-          </a:p>
-          <a:p>
-            <a:pPr marL="342900" indent="-342900">
-              <a:buFont typeface="Arial" panose="020B0604020202020204" pitchFamily="34" charset="0"/>
-              <a:buChar char="•"/>
-            </a:pPr>
-            <a:r>
-              <a:rPr lang="en-US" sz="2000" dirty="0"/>
-              <a:t>Use UM </a:t>
-            </a:r>
-            <a:r>
-              <a:rPr lang="en-US" sz="2000" dirty="0" err="1"/>
-              <a:t>comando</a:t>
-            </a:r>
-            <a:r>
-              <a:rPr lang="en-US" sz="2000" dirty="0"/>
-              <a:t> para remover </a:t>
-            </a:r>
-            <a:r>
-              <a:rPr lang="en-US" sz="2000" dirty="0" err="1"/>
-              <a:t>todos</a:t>
-            </a:r>
-            <a:r>
-              <a:rPr lang="en-US" sz="2000" dirty="0"/>
-              <a:t> </a:t>
-            </a:r>
-            <a:r>
-              <a:rPr lang="en-US" sz="2000" dirty="0" err="1"/>
-              <a:t>os</a:t>
-            </a:r>
-            <a:r>
-              <a:rPr lang="en-US" sz="2000" dirty="0"/>
-              <a:t> Registros da </a:t>
-            </a:r>
-            <a:r>
-              <a:rPr lang="en-US" sz="2000" dirty="0" err="1"/>
-              <a:t>tabela</a:t>
-            </a:r>
-            <a:r>
-              <a:rPr lang="en-US" sz="2000" dirty="0"/>
-              <a:t>.</a:t>
-            </a:r>
+            <a:endParaRPr lang="en-US" sz="2000" dirty="0">
+              <a:ea typeface="Calibri"/>
+              <a:cs typeface="Calibri"/>
+            </a:endParaRPr>
           </a:p>
         </p:txBody>
       </p:sp>
     </p:spTree>
     <p:extLst>
       <p:ext uri="{BB962C8B-B14F-4D97-AF65-F5344CB8AC3E}">
-        <p14:creationId xmlns:p14="http://schemas.microsoft.com/office/powerpoint/2010/main" val="1238809061"/>
+        <p14:creationId xmlns:p14="http://schemas.microsoft.com/office/powerpoint/2010/main" val="2222137467"/>
       </p:ext>
     </p:extLst>
   </p:cSld>
